--- a/docs/presentation/Avances_Tutor_Academico_TP2.pptx
+++ b/docs/presentation/Avances_Tutor_Academico_TP2.pptx
@@ -5,17 +5,17 @@
     <p:sldMasterId id="2147483648" r:id="rId1"/>
   </p:sldMasterIdLst>
   <p:sldIdLst>
-    <p:sldId id="256" r:id="rId7"/>
-    <p:sldId id="257" r:id="rId8"/>
-    <p:sldId id="258" r:id="rId9"/>
-    <p:sldId id="259" r:id="rId10"/>
-    <p:sldId id="260" r:id="rId11"/>
-    <p:sldId id="261" r:id="rId12"/>
-    <p:sldId id="262" r:id="rId13"/>
-    <p:sldId id="263" r:id="rId14"/>
-    <p:sldId id="264" r:id="rId15"/>
+    <p:sldId id="256" r:id="rId2"/>
+    <p:sldId id="257" r:id="rId3"/>
+    <p:sldId id="258" r:id="rId4"/>
+    <p:sldId id="259" r:id="rId5"/>
+    <p:sldId id="260" r:id="rId6"/>
+    <p:sldId id="261" r:id="rId7"/>
+    <p:sldId id="262" r:id="rId8"/>
+    <p:sldId id="263" r:id="rId9"/>
+    <p:sldId id="264" r:id="rId10"/>
   </p:sldIdLst>
-  <p:sldSz cx="12191695" cy="6858000" type="screen4x3"/>
+  <p:sldSz cx="12192000" cy="6858000"/>
   <p:notesSz cx="6858000" cy="9144000"/>
   <p:defaultTextStyle>
     <a:defPPr>
@@ -112,6 +112,22 @@
       </a:defRPr>
     </a:lvl9pPr>
   </p:defaultTextStyle>
+  <p:extLst>
+    <p:ext uri="{EFAFB233-063F-42B5-8137-9DF3F51BA10A}">
+      <p15:sldGuideLst xmlns:p15="http://schemas.microsoft.com/office/powerpoint/2012/main">
+        <p15:guide id="1" orient="horz" pos="2160">
+          <p15:clr>
+            <a:srgbClr val="A4A3A4"/>
+          </p15:clr>
+        </p15:guide>
+        <p15:guide id="2" pos="2880">
+          <p15:clr>
+            <a:srgbClr val="A4A3A4"/>
+          </p15:clr>
+        </p15:guide>
+      </p15:sldGuideLst>
+    </p:ext>
+  </p:extLst>
 </p:presentation>
 </file>
 
@@ -153,10 +169,9 @@
           <a:lstStyle/>
           <a:p>
             <a:r>
-              <a:rPr lang="en-US" smtClean="0"/>
+              <a:rPr lang="en-US"/>
               <a:t>Click to edit Master title style</a:t>
             </a:r>
-            <a:endParaRPr lang="en-US"/>
           </a:p>
         </p:txBody>
       </p:sp>
@@ -272,10 +287,9 @@
           </a:lstStyle>
           <a:p>
             <a:r>
-              <a:rPr lang="en-US" smtClean="0"/>
+              <a:rPr lang="en-US"/>
               <a:t>Click to edit Master subtitle style</a:t>
             </a:r>
-            <a:endParaRPr lang="en-US"/>
           </a:p>
         </p:txBody>
       </p:sp>
@@ -296,7 +310,7 @@
           <a:p>
             <a:fld id="{5BCAD085-E8A6-8845-BD4E-CB4CCA059FC4}" type="datetimeFigureOut">
               <a:rPr lang="en-US" smtClean="0"/>
-              <a:t>1/27/13</a:t>
+              <a:t>6/21/2026</a:t>
             </a:fld>
             <a:endParaRPr lang="en-US"/>
           </a:p>
@@ -390,10 +404,9 @@
           <a:lstStyle/>
           <a:p>
             <a:r>
-              <a:rPr lang="en-US" smtClean="0"/>
+              <a:rPr lang="en-US"/>
               <a:t>Click to edit Master title style</a:t>
             </a:r>
-            <a:endParaRPr lang="en-US"/>
           </a:p>
         </p:txBody>
       </p:sp>
@@ -414,38 +427,37 @@
           <a:p>
             <a:pPr lvl="0"/>
             <a:r>
-              <a:rPr lang="en-US" smtClean="0"/>
+              <a:rPr lang="en-US"/>
               <a:t>Click to edit Master text styles</a:t>
             </a:r>
           </a:p>
           <a:p>
             <a:pPr lvl="1"/>
             <a:r>
-              <a:rPr lang="en-US" smtClean="0"/>
+              <a:rPr lang="en-US"/>
               <a:t>Second level</a:t>
             </a:r>
           </a:p>
           <a:p>
             <a:pPr lvl="2"/>
             <a:r>
-              <a:rPr lang="en-US" smtClean="0"/>
+              <a:rPr lang="en-US"/>
               <a:t>Third level</a:t>
             </a:r>
           </a:p>
           <a:p>
             <a:pPr lvl="3"/>
             <a:r>
-              <a:rPr lang="en-US" smtClean="0"/>
+              <a:rPr lang="en-US"/>
               <a:t>Fourth level</a:t>
             </a:r>
           </a:p>
           <a:p>
             <a:pPr lvl="4"/>
             <a:r>
-              <a:rPr lang="en-US" smtClean="0"/>
+              <a:rPr lang="en-US"/>
               <a:t>Fifth level</a:t>
             </a:r>
-            <a:endParaRPr lang="en-US"/>
           </a:p>
         </p:txBody>
       </p:sp>
@@ -466,7 +478,7 @@
           <a:p>
             <a:fld id="{5BCAD085-E8A6-8845-BD4E-CB4CCA059FC4}" type="datetimeFigureOut">
               <a:rPr lang="en-US" smtClean="0"/>
-              <a:t>1/27/13</a:t>
+              <a:t>6/21/2026</a:t>
             </a:fld>
             <a:endParaRPr lang="en-US"/>
           </a:p>
@@ -565,10 +577,9 @@
           <a:lstStyle/>
           <a:p>
             <a:r>
-              <a:rPr lang="en-US" smtClean="0"/>
+              <a:rPr lang="en-US"/>
               <a:t>Click to edit Master title style</a:t>
             </a:r>
-            <a:endParaRPr lang="en-US"/>
           </a:p>
         </p:txBody>
       </p:sp>
@@ -594,38 +605,37 @@
           <a:p>
             <a:pPr lvl="0"/>
             <a:r>
-              <a:rPr lang="en-US" smtClean="0"/>
+              <a:rPr lang="en-US"/>
               <a:t>Click to edit Master text styles</a:t>
             </a:r>
           </a:p>
           <a:p>
             <a:pPr lvl="1"/>
             <a:r>
-              <a:rPr lang="en-US" smtClean="0"/>
+              <a:rPr lang="en-US"/>
               <a:t>Second level</a:t>
             </a:r>
           </a:p>
           <a:p>
             <a:pPr lvl="2"/>
             <a:r>
-              <a:rPr lang="en-US" smtClean="0"/>
+              <a:rPr lang="en-US"/>
               <a:t>Third level</a:t>
             </a:r>
           </a:p>
           <a:p>
             <a:pPr lvl="3"/>
             <a:r>
-              <a:rPr lang="en-US" smtClean="0"/>
+              <a:rPr lang="en-US"/>
               <a:t>Fourth level</a:t>
             </a:r>
           </a:p>
           <a:p>
             <a:pPr lvl="4"/>
             <a:r>
-              <a:rPr lang="en-US" smtClean="0"/>
+              <a:rPr lang="en-US"/>
               <a:t>Fifth level</a:t>
             </a:r>
-            <a:endParaRPr lang="en-US"/>
           </a:p>
         </p:txBody>
       </p:sp>
@@ -646,7 +656,7 @@
           <a:p>
             <a:fld id="{5BCAD085-E8A6-8845-BD4E-CB4CCA059FC4}" type="datetimeFigureOut">
               <a:rPr lang="en-US" smtClean="0"/>
-              <a:t>1/27/13</a:t>
+              <a:t>6/21/2026</a:t>
             </a:fld>
             <a:endParaRPr lang="en-US"/>
           </a:p>
@@ -740,10 +750,9 @@
           <a:lstStyle/>
           <a:p>
             <a:r>
-              <a:rPr lang="en-US" smtClean="0"/>
+              <a:rPr lang="en-US"/>
               <a:t>Click to edit Master title style</a:t>
             </a:r>
-            <a:endParaRPr lang="en-US"/>
           </a:p>
         </p:txBody>
       </p:sp>
@@ -764,38 +773,37 @@
           <a:p>
             <a:pPr lvl="0"/>
             <a:r>
-              <a:rPr lang="en-US" smtClean="0"/>
+              <a:rPr lang="en-US"/>
               <a:t>Click to edit Master text styles</a:t>
             </a:r>
           </a:p>
           <a:p>
             <a:pPr lvl="1"/>
             <a:r>
-              <a:rPr lang="en-US" smtClean="0"/>
+              <a:rPr lang="en-US"/>
               <a:t>Second level</a:t>
             </a:r>
           </a:p>
           <a:p>
             <a:pPr lvl="2"/>
             <a:r>
-              <a:rPr lang="en-US" smtClean="0"/>
+              <a:rPr lang="en-US"/>
               <a:t>Third level</a:t>
             </a:r>
           </a:p>
           <a:p>
             <a:pPr lvl="3"/>
             <a:r>
-              <a:rPr lang="en-US" smtClean="0"/>
+              <a:rPr lang="en-US"/>
               <a:t>Fourth level</a:t>
             </a:r>
           </a:p>
           <a:p>
             <a:pPr lvl="4"/>
             <a:r>
-              <a:rPr lang="en-US" smtClean="0"/>
+              <a:rPr lang="en-US"/>
               <a:t>Fifth level</a:t>
             </a:r>
-            <a:endParaRPr lang="en-US"/>
           </a:p>
         </p:txBody>
       </p:sp>
@@ -816,7 +824,7 @@
           <a:p>
             <a:fld id="{5BCAD085-E8A6-8845-BD4E-CB4CCA059FC4}" type="datetimeFigureOut">
               <a:rPr lang="en-US" smtClean="0"/>
-              <a:t>1/27/13</a:t>
+              <a:t>6/21/2026</a:t>
             </a:fld>
             <a:endParaRPr lang="en-US"/>
           </a:p>
@@ -919,10 +927,9 @@
           </a:lstStyle>
           <a:p>
             <a:r>
-              <a:rPr lang="en-US" smtClean="0"/>
+              <a:rPr lang="en-US"/>
               <a:t>Click to edit Master title style</a:t>
             </a:r>
-            <a:endParaRPr lang="en-US"/>
           </a:p>
         </p:txBody>
       </p:sp>
@@ -1039,7 +1046,7 @@
           <a:p>
             <a:pPr lvl="0"/>
             <a:r>
-              <a:rPr lang="en-US" smtClean="0"/>
+              <a:rPr lang="en-US"/>
               <a:t>Click to edit Master text styles</a:t>
             </a:r>
           </a:p>
@@ -1062,7 +1069,7 @@
           <a:p>
             <a:fld id="{5BCAD085-E8A6-8845-BD4E-CB4CCA059FC4}" type="datetimeFigureOut">
               <a:rPr lang="en-US" smtClean="0"/>
-              <a:t>1/27/13</a:t>
+              <a:t>6/21/2026</a:t>
             </a:fld>
             <a:endParaRPr lang="en-US"/>
           </a:p>
@@ -1156,10 +1163,9 @@
           <a:lstStyle/>
           <a:p>
             <a:r>
-              <a:rPr lang="en-US" smtClean="0"/>
+              <a:rPr lang="en-US"/>
               <a:t>Click to edit Master title style</a:t>
             </a:r>
-            <a:endParaRPr lang="en-US"/>
           </a:p>
         </p:txBody>
       </p:sp>
@@ -1213,38 +1219,37 @@
           <a:p>
             <a:pPr lvl="0"/>
             <a:r>
-              <a:rPr lang="en-US" smtClean="0"/>
+              <a:rPr lang="en-US"/>
               <a:t>Click to edit Master text styles</a:t>
             </a:r>
           </a:p>
           <a:p>
             <a:pPr lvl="1"/>
             <a:r>
-              <a:rPr lang="en-US" smtClean="0"/>
+              <a:rPr lang="en-US"/>
               <a:t>Second level</a:t>
             </a:r>
           </a:p>
           <a:p>
             <a:pPr lvl="2"/>
             <a:r>
-              <a:rPr lang="en-US" smtClean="0"/>
+              <a:rPr lang="en-US"/>
               <a:t>Third level</a:t>
             </a:r>
           </a:p>
           <a:p>
             <a:pPr lvl="3"/>
             <a:r>
-              <a:rPr lang="en-US" smtClean="0"/>
+              <a:rPr lang="en-US"/>
               <a:t>Fourth level</a:t>
             </a:r>
           </a:p>
           <a:p>
             <a:pPr lvl="4"/>
             <a:r>
-              <a:rPr lang="en-US" smtClean="0"/>
+              <a:rPr lang="en-US"/>
               <a:t>Fifth level</a:t>
             </a:r>
-            <a:endParaRPr lang="en-US"/>
           </a:p>
         </p:txBody>
       </p:sp>
@@ -1298,38 +1303,37 @@
           <a:p>
             <a:pPr lvl="0"/>
             <a:r>
-              <a:rPr lang="en-US" smtClean="0"/>
+              <a:rPr lang="en-US"/>
               <a:t>Click to edit Master text styles</a:t>
             </a:r>
           </a:p>
           <a:p>
             <a:pPr lvl="1"/>
             <a:r>
-              <a:rPr lang="en-US" smtClean="0"/>
+              <a:rPr lang="en-US"/>
               <a:t>Second level</a:t>
             </a:r>
           </a:p>
           <a:p>
             <a:pPr lvl="2"/>
             <a:r>
-              <a:rPr lang="en-US" smtClean="0"/>
+              <a:rPr lang="en-US"/>
               <a:t>Third level</a:t>
             </a:r>
           </a:p>
           <a:p>
             <a:pPr lvl="3"/>
             <a:r>
-              <a:rPr lang="en-US" smtClean="0"/>
+              <a:rPr lang="en-US"/>
               <a:t>Fourth level</a:t>
             </a:r>
           </a:p>
           <a:p>
             <a:pPr lvl="4"/>
             <a:r>
-              <a:rPr lang="en-US" smtClean="0"/>
+              <a:rPr lang="en-US"/>
               <a:t>Fifth level</a:t>
             </a:r>
-            <a:endParaRPr lang="en-US"/>
           </a:p>
         </p:txBody>
       </p:sp>
@@ -1350,7 +1354,7 @@
           <a:p>
             <a:fld id="{5BCAD085-E8A6-8845-BD4E-CB4CCA059FC4}" type="datetimeFigureOut">
               <a:rPr lang="en-US" smtClean="0"/>
-              <a:t>1/27/13</a:t>
+              <a:t>6/21/2026</a:t>
             </a:fld>
             <a:endParaRPr lang="en-US"/>
           </a:p>
@@ -1448,10 +1452,9 @@
           </a:lstStyle>
           <a:p>
             <a:r>
-              <a:rPr lang="en-US" smtClean="0"/>
+              <a:rPr lang="en-US"/>
               <a:t>Click to edit Master title style</a:t>
             </a:r>
-            <a:endParaRPr lang="en-US"/>
           </a:p>
         </p:txBody>
       </p:sp>
@@ -1514,7 +1517,7 @@
           <a:p>
             <a:pPr lvl="0"/>
             <a:r>
-              <a:rPr lang="en-US" smtClean="0"/>
+              <a:rPr lang="en-US"/>
               <a:t>Click to edit Master text styles</a:t>
             </a:r>
           </a:p>
@@ -1570,38 +1573,37 @@
           <a:p>
             <a:pPr lvl="0"/>
             <a:r>
-              <a:rPr lang="en-US" smtClean="0"/>
+              <a:rPr lang="en-US"/>
               <a:t>Click to edit Master text styles</a:t>
             </a:r>
           </a:p>
           <a:p>
             <a:pPr lvl="1"/>
             <a:r>
-              <a:rPr lang="en-US" smtClean="0"/>
+              <a:rPr lang="en-US"/>
               <a:t>Second level</a:t>
             </a:r>
           </a:p>
           <a:p>
             <a:pPr lvl="2"/>
             <a:r>
-              <a:rPr lang="en-US" smtClean="0"/>
+              <a:rPr lang="en-US"/>
               <a:t>Third level</a:t>
             </a:r>
           </a:p>
           <a:p>
             <a:pPr lvl="3"/>
             <a:r>
-              <a:rPr lang="en-US" smtClean="0"/>
+              <a:rPr lang="en-US"/>
               <a:t>Fourth level</a:t>
             </a:r>
           </a:p>
           <a:p>
             <a:pPr lvl="4"/>
             <a:r>
-              <a:rPr lang="en-US" smtClean="0"/>
+              <a:rPr lang="en-US"/>
               <a:t>Fifth level</a:t>
             </a:r>
-            <a:endParaRPr lang="en-US"/>
           </a:p>
         </p:txBody>
       </p:sp>
@@ -1664,7 +1666,7 @@
           <a:p>
             <a:pPr lvl="0"/>
             <a:r>
-              <a:rPr lang="en-US" smtClean="0"/>
+              <a:rPr lang="en-US"/>
               <a:t>Click to edit Master text styles</a:t>
             </a:r>
           </a:p>
@@ -1720,38 +1722,37 @@
           <a:p>
             <a:pPr lvl="0"/>
             <a:r>
-              <a:rPr lang="en-US" smtClean="0"/>
+              <a:rPr lang="en-US"/>
               <a:t>Click to edit Master text styles</a:t>
             </a:r>
           </a:p>
           <a:p>
             <a:pPr lvl="1"/>
             <a:r>
-              <a:rPr lang="en-US" smtClean="0"/>
+              <a:rPr lang="en-US"/>
               <a:t>Second level</a:t>
             </a:r>
           </a:p>
           <a:p>
             <a:pPr lvl="2"/>
             <a:r>
-              <a:rPr lang="en-US" smtClean="0"/>
+              <a:rPr lang="en-US"/>
               <a:t>Third level</a:t>
             </a:r>
           </a:p>
           <a:p>
             <a:pPr lvl="3"/>
             <a:r>
-              <a:rPr lang="en-US" smtClean="0"/>
+              <a:rPr lang="en-US"/>
               <a:t>Fourth level</a:t>
             </a:r>
           </a:p>
           <a:p>
             <a:pPr lvl="4"/>
             <a:r>
-              <a:rPr lang="en-US" smtClean="0"/>
+              <a:rPr lang="en-US"/>
               <a:t>Fifth level</a:t>
             </a:r>
-            <a:endParaRPr lang="en-US"/>
           </a:p>
         </p:txBody>
       </p:sp>
@@ -1772,7 +1773,7 @@
           <a:p>
             <a:fld id="{5BCAD085-E8A6-8845-BD4E-CB4CCA059FC4}" type="datetimeFigureOut">
               <a:rPr lang="en-US" smtClean="0"/>
-              <a:t>1/27/13</a:t>
+              <a:t>6/21/2026</a:t>
             </a:fld>
             <a:endParaRPr lang="en-US"/>
           </a:p>
@@ -1866,10 +1867,9 @@
           <a:lstStyle/>
           <a:p>
             <a:r>
-              <a:rPr lang="en-US" smtClean="0"/>
+              <a:rPr lang="en-US"/>
               <a:t>Click to edit Master title style</a:t>
             </a:r>
-            <a:endParaRPr lang="en-US"/>
           </a:p>
         </p:txBody>
       </p:sp>
@@ -1890,7 +1890,7 @@
           <a:p>
             <a:fld id="{5BCAD085-E8A6-8845-BD4E-CB4CCA059FC4}" type="datetimeFigureOut">
               <a:rPr lang="en-US" smtClean="0"/>
-              <a:t>1/27/13</a:t>
+              <a:t>6/21/2026</a:t>
             </a:fld>
             <a:endParaRPr lang="en-US"/>
           </a:p>
@@ -1985,7 +1985,7 @@
           <a:p>
             <a:fld id="{5BCAD085-E8A6-8845-BD4E-CB4CCA059FC4}" type="datetimeFigureOut">
               <a:rPr lang="en-US" smtClean="0"/>
-              <a:t>1/27/13</a:t>
+              <a:t>6/21/2026</a:t>
             </a:fld>
             <a:endParaRPr lang="en-US"/>
           </a:p>
@@ -2088,10 +2088,9 @@
           </a:lstStyle>
           <a:p>
             <a:r>
-              <a:rPr lang="en-US" smtClean="0"/>
+              <a:rPr lang="en-US"/>
               <a:t>Click to edit Master title style</a:t>
             </a:r>
-            <a:endParaRPr lang="en-US"/>
           </a:p>
         </p:txBody>
       </p:sp>
@@ -2145,38 +2144,37 @@
           <a:p>
             <a:pPr lvl="0"/>
             <a:r>
-              <a:rPr lang="en-US" smtClean="0"/>
+              <a:rPr lang="en-US"/>
               <a:t>Click to edit Master text styles</a:t>
             </a:r>
           </a:p>
           <a:p>
             <a:pPr lvl="1"/>
             <a:r>
-              <a:rPr lang="en-US" smtClean="0"/>
+              <a:rPr lang="en-US"/>
               <a:t>Second level</a:t>
             </a:r>
           </a:p>
           <a:p>
             <a:pPr lvl="2"/>
             <a:r>
-              <a:rPr lang="en-US" smtClean="0"/>
+              <a:rPr lang="en-US"/>
               <a:t>Third level</a:t>
             </a:r>
           </a:p>
           <a:p>
             <a:pPr lvl="3"/>
             <a:r>
-              <a:rPr lang="en-US" smtClean="0"/>
+              <a:rPr lang="en-US"/>
               <a:t>Fourth level</a:t>
             </a:r>
           </a:p>
           <a:p>
             <a:pPr lvl="4"/>
             <a:r>
-              <a:rPr lang="en-US" smtClean="0"/>
+              <a:rPr lang="en-US"/>
               <a:t>Fifth level</a:t>
             </a:r>
-            <a:endParaRPr lang="en-US"/>
           </a:p>
         </p:txBody>
       </p:sp>
@@ -2239,7 +2237,7 @@
           <a:p>
             <a:pPr lvl="0"/>
             <a:r>
-              <a:rPr lang="en-US" smtClean="0"/>
+              <a:rPr lang="en-US"/>
               <a:t>Click to edit Master text styles</a:t>
             </a:r>
           </a:p>
@@ -2262,7 +2260,7 @@
           <a:p>
             <a:fld id="{5BCAD085-E8A6-8845-BD4E-CB4CCA059FC4}" type="datetimeFigureOut">
               <a:rPr lang="en-US" smtClean="0"/>
-              <a:t>1/27/13</a:t>
+              <a:t>6/21/2026</a:t>
             </a:fld>
             <a:endParaRPr lang="en-US"/>
           </a:p>
@@ -2365,10 +2363,9 @@
           </a:lstStyle>
           <a:p>
             <a:r>
-              <a:rPr lang="en-US" smtClean="0"/>
+              <a:rPr lang="en-US"/>
               <a:t>Click to edit Master title style</a:t>
             </a:r>
-            <a:endParaRPr lang="en-US"/>
           </a:p>
         </p:txBody>
       </p:sp>
@@ -2492,7 +2489,7 @@
           <a:p>
             <a:pPr lvl="0"/>
             <a:r>
-              <a:rPr lang="en-US" smtClean="0"/>
+              <a:rPr lang="en-US"/>
               <a:t>Click to edit Master text styles</a:t>
             </a:r>
           </a:p>
@@ -2515,7 +2512,7 @@
           <a:p>
             <a:fld id="{5BCAD085-E8A6-8845-BD4E-CB4CCA059FC4}" type="datetimeFigureOut">
               <a:rPr lang="en-US" smtClean="0"/>
-              <a:t>1/27/13</a:t>
+              <a:t>6/21/2026</a:t>
             </a:fld>
             <a:endParaRPr lang="en-US"/>
           </a:p>
@@ -2624,10 +2621,9 @@
           <a:lstStyle/>
           <a:p>
             <a:r>
-              <a:rPr lang="en-US" smtClean="0"/>
+              <a:rPr lang="en-US"/>
               <a:t>Click to edit Master title style</a:t>
             </a:r>
-            <a:endParaRPr lang="en-US"/>
           </a:p>
         </p:txBody>
       </p:sp>
@@ -2658,38 +2654,37 @@
           <a:p>
             <a:pPr lvl="0"/>
             <a:r>
-              <a:rPr lang="en-US" smtClean="0"/>
+              <a:rPr lang="en-US"/>
               <a:t>Click to edit Master text styles</a:t>
             </a:r>
           </a:p>
           <a:p>
             <a:pPr lvl="1"/>
             <a:r>
-              <a:rPr lang="en-US" smtClean="0"/>
+              <a:rPr lang="en-US"/>
               <a:t>Second level</a:t>
             </a:r>
           </a:p>
           <a:p>
             <a:pPr lvl="2"/>
             <a:r>
-              <a:rPr lang="en-US" smtClean="0"/>
+              <a:rPr lang="en-US"/>
               <a:t>Third level</a:t>
             </a:r>
           </a:p>
           <a:p>
             <a:pPr lvl="3"/>
             <a:r>
-              <a:rPr lang="en-US" smtClean="0"/>
+              <a:rPr lang="en-US"/>
               <a:t>Fourth level</a:t>
             </a:r>
           </a:p>
           <a:p>
             <a:pPr lvl="4"/>
             <a:r>
-              <a:rPr lang="en-US" smtClean="0"/>
+              <a:rPr lang="en-US"/>
               <a:t>Fifth level</a:t>
             </a:r>
-            <a:endParaRPr lang="en-US"/>
           </a:p>
         </p:txBody>
       </p:sp>
@@ -2728,7 +2723,7 @@
           <a:p>
             <a:fld id="{5BCAD085-E8A6-8845-BD4E-CB4CCA059FC4}" type="datetimeFigureOut">
               <a:rPr lang="en-US" smtClean="0"/>
-              <a:t>1/27/13</a:t>
+              <a:t>6/21/2026</a:t>
             </a:fld>
             <a:endParaRPr lang="en-US"/>
           </a:p>
@@ -3087,7 +3082,7 @@
 </file>
 
 <file path=ppt/slides/slide1.xml><?xml version="1.0" encoding="utf-8"?>
-<p:sld xmlns:a="http://schemas.openxmlformats.org/drawingml/2006/main" xmlns:p="http://schemas.openxmlformats.org/presentationml/2006/main" xmlns:r="http://schemas.openxmlformats.org/officeDocument/2006/relationships">
+<p:sld xmlns:a="http://schemas.openxmlformats.org/drawingml/2006/main" xmlns:r="http://schemas.openxmlformats.org/officeDocument/2006/relationships" xmlns:p="http://schemas.openxmlformats.org/presentationml/2006/main">
   <p:cSld>
     <p:spTree>
       <p:nvGrpSpPr>
@@ -3095,7 +3090,14 @@
         <p:cNvGrpSpPr/>
         <p:nvPr/>
       </p:nvGrpSpPr>
-      <p:grpSpPr/>
+      <p:grpSpPr>
+        <a:xfrm>
+          <a:off x="0" y="0"/>
+          <a:ext cx="0" cy="0"/>
+          <a:chOff x="0" y="0"/>
+          <a:chExt cx="0" cy="0"/>
+        </a:xfrm>
+      </p:grpSpPr>
       <p:sp>
         <p:nvSpPr>
           <p:cNvPr id="2" name="Rectangle 1"/>
@@ -3137,6 +3139,7 @@
           <a:lstStyle/>
           <a:p>
             <a:pPr algn="ctr"/>
+            <a:endParaRPr/>
           </a:p>
         </p:txBody>
       </p:sp>
@@ -3181,6 +3184,7 @@
           <a:lstStyle/>
           <a:p>
             <a:pPr algn="ctr"/>
+            <a:endParaRPr/>
           </a:p>
         </p:txBody>
       </p:sp>
@@ -3225,6 +3229,7 @@
           <a:lstStyle/>
           <a:p>
             <a:pPr algn="ctr"/>
+            <a:endParaRPr/>
           </a:p>
         </p:txBody>
       </p:sp>
@@ -3245,7 +3250,7 @@
           <a:noFill/>
         </p:spPr>
         <p:txBody>
-          <a:bodyPr wrap="square" anchor="ctr" lIns="25400" rIns="25400" tIns="12700" bIns="12700">
+          <a:bodyPr wrap="square" lIns="25400" tIns="12700" rIns="25400" bIns="12700" anchor="ctr">
             <a:spAutoFit/>
           </a:bodyPr>
           <a:lstStyle/>
@@ -3287,7 +3292,7 @@
           <a:noFill/>
         </p:spPr>
         <p:txBody>
-          <a:bodyPr wrap="square" anchor="t" lIns="25400" rIns="25400" tIns="12700" bIns="12700">
+          <a:bodyPr wrap="square" lIns="25400" tIns="12700" rIns="25400" bIns="12700" anchor="t">
             <a:spAutoFit/>
           </a:bodyPr>
           <a:lstStyle/>
@@ -3329,7 +3334,7 @@
           <a:noFill/>
         </p:spPr>
         <p:txBody>
-          <a:bodyPr wrap="square" anchor="t" lIns="25400" rIns="25400" tIns="12700" bIns="12700">
+          <a:bodyPr wrap="square" lIns="25400" tIns="12700" rIns="25400" bIns="12700" anchor="t">
             <a:spAutoFit/>
           </a:bodyPr>
           <a:lstStyle/>
@@ -3371,7 +3376,7 @@
           <a:noFill/>
         </p:spPr>
         <p:txBody>
-          <a:bodyPr wrap="square" anchor="t" lIns="25400" rIns="25400" tIns="12700" bIns="12700">
+          <a:bodyPr wrap="square" lIns="25400" tIns="12700" rIns="25400" bIns="12700" anchor="t">
             <a:spAutoFit/>
           </a:bodyPr>
           <a:lstStyle/>
@@ -3385,14 +3390,146 @@
               </a:spcAft>
             </a:pPr>
             <a:r>
-              <a:rPr sz="1600" b="0">
+              <a:rPr sz="1600" b="0" dirty="0" err="1">
                 <a:solidFill>
                   <a:srgbClr val="C4B5FD"/>
                 </a:solidFill>
                 <a:latin typeface="Calibri"/>
               </a:rPr>
-              <a:t>Grafos reales de cada agente · traza real de generación de examen · estado por épica</a:t>
-            </a:r>
+              <a:t>Grafos</a:t>
+            </a:r>
+            <a:r>
+              <a:rPr sz="1600" b="0" dirty="0">
+                <a:solidFill>
+                  <a:srgbClr val="C4B5FD"/>
+                </a:solidFill>
+                <a:latin typeface="Calibri"/>
+              </a:rPr>
+              <a:t> reales de </a:t>
+            </a:r>
+            <a:r>
+              <a:rPr sz="1600" b="0" dirty="0" err="1">
+                <a:solidFill>
+                  <a:srgbClr val="C4B5FD"/>
+                </a:solidFill>
+                <a:latin typeface="Calibri"/>
+              </a:rPr>
+              <a:t>cada</a:t>
+            </a:r>
+            <a:r>
+              <a:rPr sz="1600" b="0" dirty="0">
+                <a:solidFill>
+                  <a:srgbClr val="C4B5FD"/>
+                </a:solidFill>
+                <a:latin typeface="Calibri"/>
+              </a:rPr>
+              <a:t> </a:t>
+            </a:r>
+            <a:r>
+              <a:rPr sz="1600" b="0" dirty="0" err="1">
+                <a:solidFill>
+                  <a:srgbClr val="C4B5FD"/>
+                </a:solidFill>
+                <a:latin typeface="Calibri"/>
+              </a:rPr>
+              <a:t>agente</a:t>
+            </a:r>
+            <a:r>
+              <a:rPr sz="1600" b="0" dirty="0">
+                <a:solidFill>
+                  <a:srgbClr val="C4B5FD"/>
+                </a:solidFill>
+                <a:latin typeface="Calibri"/>
+              </a:rPr>
+              <a:t> · </a:t>
+            </a:r>
+            <a:r>
+              <a:rPr sz="1600" b="0" dirty="0" err="1">
+                <a:solidFill>
+                  <a:srgbClr val="C4B5FD"/>
+                </a:solidFill>
+                <a:latin typeface="Calibri"/>
+              </a:rPr>
+              <a:t>traza</a:t>
+            </a:r>
+            <a:r>
+              <a:rPr sz="1600" b="0" dirty="0">
+                <a:solidFill>
+                  <a:srgbClr val="C4B5FD"/>
+                </a:solidFill>
+                <a:latin typeface="Calibri"/>
+              </a:rPr>
+              <a:t> real de </a:t>
+            </a:r>
+            <a:r>
+              <a:rPr lang="en-US" sz="1600" b="0" dirty="0" err="1">
+                <a:solidFill>
+                  <a:srgbClr val="C4B5FD"/>
+                </a:solidFill>
+                <a:latin typeface="Calibri"/>
+              </a:rPr>
+              <a:t>generación</a:t>
+            </a:r>
+            <a:r>
+              <a:rPr sz="1600" b="0" dirty="0">
+                <a:solidFill>
+                  <a:srgbClr val="C4B5FD"/>
+                </a:solidFill>
+                <a:latin typeface="Calibri"/>
+              </a:rPr>
+              <a:t> de examen · </a:t>
+            </a:r>
+            <a:r>
+              <a:rPr sz="1600" b="0" dirty="0" err="1">
+                <a:solidFill>
+                  <a:srgbClr val="C4B5FD"/>
+                </a:solidFill>
+                <a:latin typeface="Calibri"/>
+              </a:rPr>
+              <a:t>estado</a:t>
+            </a:r>
+            <a:r>
+              <a:rPr sz="1600" b="0" dirty="0">
+                <a:solidFill>
+                  <a:srgbClr val="C4B5FD"/>
+                </a:solidFill>
+                <a:latin typeface="Calibri"/>
+              </a:rPr>
+              <a:t> </a:t>
+            </a:r>
+            <a:r>
+              <a:rPr sz="1600" b="0" dirty="0" err="1">
+                <a:solidFill>
+                  <a:srgbClr val="C4B5FD"/>
+                </a:solidFill>
+                <a:latin typeface="Calibri"/>
+              </a:rPr>
+              <a:t>por</a:t>
+            </a:r>
+            <a:r>
+              <a:rPr sz="1600" b="0" dirty="0">
+                <a:solidFill>
+                  <a:srgbClr val="C4B5FD"/>
+                </a:solidFill>
+                <a:latin typeface="Calibri"/>
+              </a:rPr>
+              <a:t> </a:t>
+            </a:r>
+            <a:r>
+              <a:rPr sz="1600" b="0" dirty="0" err="1">
+                <a:solidFill>
+                  <a:srgbClr val="C4B5FD"/>
+                </a:solidFill>
+                <a:latin typeface="Calibri"/>
+              </a:rPr>
+              <a:t>épica</a:t>
+            </a:r>
+            <a:endParaRPr sz="1600" b="0" dirty="0">
+              <a:solidFill>
+                <a:srgbClr val="C4B5FD"/>
+              </a:solidFill>
+              <a:latin typeface="Calibri"/>
+            </a:endParaRPr>
           </a:p>
         </p:txBody>
       </p:sp>
@@ -3405,7 +3542,7 @@
         <p:spPr>
           <a:xfrm>
             <a:off x="822960" y="5897880"/>
-            <a:ext cx="10515600" cy="457200"/>
+            <a:ext cx="10515600" cy="241092"/>
           </a:xfrm>
           <a:prstGeom prst="rect">
             <a:avLst/>
@@ -3413,7 +3550,7 @@
           <a:noFill/>
         </p:spPr>
         <p:txBody>
-          <a:bodyPr wrap="square" anchor="t" lIns="25400" rIns="25400" tIns="12700" bIns="12700">
+          <a:bodyPr wrap="square" lIns="25400" tIns="12700" rIns="25400" bIns="12700" anchor="t">
             <a:spAutoFit/>
           </a:bodyPr>
           <a:lstStyle/>
@@ -3427,13 +3564,58 @@
               </a:spcAft>
             </a:pPr>
             <a:r>
-              <a:rPr sz="1400" b="0">
+              <a:rPr sz="1400" b="0" dirty="0" err="1">
                 <a:solidFill>
                   <a:srgbClr val="9CA3AF"/>
                 </a:solidFill>
                 <a:latin typeface="Calibri"/>
               </a:rPr>
-              <a:t>Trabajo Práctico N°2  ·  Inteligencia Artificial 2026  ·  UTN Santa Fe — CIDISI</a:t>
+              <a:t>Trabajo</a:t>
+            </a:r>
+            <a:r>
+              <a:rPr sz="1400" b="0" dirty="0">
+                <a:solidFill>
+                  <a:srgbClr val="9CA3AF"/>
+                </a:solidFill>
+                <a:latin typeface="Calibri"/>
+              </a:rPr>
+              <a:t> </a:t>
+            </a:r>
+            <a:r>
+              <a:rPr sz="1400" b="0" dirty="0" err="1">
+                <a:solidFill>
+                  <a:srgbClr val="9CA3AF"/>
+                </a:solidFill>
+                <a:latin typeface="Calibri"/>
+              </a:rPr>
+              <a:t>Práctico</a:t>
+            </a:r>
+            <a:r>
+              <a:rPr sz="1400" b="0" dirty="0">
+                <a:solidFill>
+                  <a:srgbClr val="9CA3AF"/>
+                </a:solidFill>
+                <a:latin typeface="Calibri"/>
+              </a:rPr>
+              <a:t> N°2  ·  </a:t>
+            </a:r>
+            <a:r>
+              <a:rPr sz="1400" b="0" dirty="0" err="1">
+                <a:solidFill>
+                  <a:srgbClr val="9CA3AF"/>
+                </a:solidFill>
+                <a:latin typeface="Calibri"/>
+              </a:rPr>
+              <a:t>Inteligencia</a:t>
+            </a:r>
+            <a:r>
+              <a:rPr sz="1400" b="0" dirty="0">
+                <a:solidFill>
+                  <a:srgbClr val="9CA3AF"/>
+                </a:solidFill>
+                <a:latin typeface="Calibri"/>
+              </a:rPr>
+              <a:t> Artificial 2026  ·  UTN Santa Fe</a:t>
             </a:r>
           </a:p>
         </p:txBody>
@@ -3447,7 +3629,7 @@
 </file>
 
 <file path=ppt/slides/slide2.xml><?xml version="1.0" encoding="utf-8"?>
-<p:sld xmlns:a="http://schemas.openxmlformats.org/drawingml/2006/main" xmlns:p="http://schemas.openxmlformats.org/presentationml/2006/main" xmlns:r="http://schemas.openxmlformats.org/officeDocument/2006/relationships">
+<p:sld xmlns:a="http://schemas.openxmlformats.org/drawingml/2006/main" xmlns:r="http://schemas.openxmlformats.org/officeDocument/2006/relationships" xmlns:p="http://schemas.openxmlformats.org/presentationml/2006/main">
   <p:cSld>
     <p:spTree>
       <p:nvGrpSpPr>
@@ -3455,7 +3637,14 @@
         <p:cNvGrpSpPr/>
         <p:nvPr/>
       </p:nvGrpSpPr>
-      <p:grpSpPr/>
+      <p:grpSpPr>
+        <a:xfrm>
+          <a:off x="0" y="0"/>
+          <a:ext cx="0" cy="0"/>
+          <a:chOff x="0" y="0"/>
+          <a:chExt cx="0" cy="0"/>
+        </a:xfrm>
+      </p:grpSpPr>
       <p:sp>
         <p:nvSpPr>
           <p:cNvPr id="2" name="Rectangle 1"/>
@@ -3497,6 +3686,7 @@
           <a:lstStyle/>
           <a:p>
             <a:pPr algn="ctr"/>
+            <a:endParaRPr/>
           </a:p>
         </p:txBody>
       </p:sp>
@@ -3541,6 +3731,7 @@
           <a:lstStyle/>
           <a:p>
             <a:pPr algn="ctr"/>
+            <a:endParaRPr/>
           </a:p>
         </p:txBody>
       </p:sp>
@@ -3561,7 +3752,7 @@
           <a:noFill/>
         </p:spPr>
         <p:txBody>
-          <a:bodyPr wrap="square" anchor="t" lIns="25400" rIns="25400" tIns="12700" bIns="12700">
+          <a:bodyPr wrap="square" lIns="25400" tIns="12700" rIns="25400" bIns="12700" anchor="t">
             <a:spAutoFit/>
           </a:bodyPr>
           <a:lstStyle/>
@@ -3603,7 +3794,7 @@
           <a:noFill/>
         </p:spPr>
         <p:txBody>
-          <a:bodyPr wrap="square" anchor="t" lIns="25400" rIns="25400" tIns="12700" bIns="12700">
+          <a:bodyPr wrap="square" lIns="25400" tIns="12700" rIns="25400" bIns="12700" anchor="t">
             <a:spAutoFit/>
           </a:bodyPr>
           <a:lstStyle/>
@@ -3645,7 +3836,7 @@
           <a:noFill/>
         </p:spPr>
         <p:txBody>
-          <a:bodyPr wrap="square" anchor="t" lIns="25400" rIns="25400" tIns="12700" bIns="12700">
+          <a:bodyPr wrap="square" lIns="25400" tIns="12700" rIns="25400" bIns="12700" anchor="t">
             <a:spAutoFit/>
           </a:bodyPr>
           <a:lstStyle/>
@@ -3679,7 +3870,7 @@
         <p:spPr>
           <a:xfrm>
             <a:off x="502920" y="6483096"/>
-            <a:ext cx="8229600" cy="274320"/>
+            <a:ext cx="8229600" cy="164148"/>
           </a:xfrm>
           <a:prstGeom prst="rect">
             <a:avLst/>
@@ -3687,7 +3878,7 @@
           <a:noFill/>
         </p:spPr>
         <p:txBody>
-          <a:bodyPr wrap="square" anchor="t" lIns="25400" rIns="25400" tIns="12700" bIns="12700">
+          <a:bodyPr wrap="square" lIns="25400" tIns="12700" rIns="25400" bIns="12700" anchor="t">
             <a:spAutoFit/>
           </a:bodyPr>
           <a:lstStyle/>
@@ -3701,13 +3892,31 @@
               </a:spcAft>
             </a:pPr>
             <a:r>
-              <a:rPr sz="900" b="0">
+              <a:rPr sz="900" b="0" dirty="0">
                 <a:solidFill>
                   <a:srgbClr val="6B7280"/>
                 </a:solidFill>
                 <a:latin typeface="Calibri"/>
               </a:rPr>
-              <a:t>Tutor Académico Personal · IA 2026 · UTN Santa Fe — CIDISI</a:t>
+              <a:t>Tutor </a:t>
+            </a:r>
+            <a:r>
+              <a:rPr sz="900" b="0" dirty="0" err="1">
+                <a:solidFill>
+                  <a:srgbClr val="6B7280"/>
+                </a:solidFill>
+                <a:latin typeface="Calibri"/>
+              </a:rPr>
+              <a:t>Académico</a:t>
+            </a:r>
+            <a:r>
+              <a:rPr sz="900" b="0" dirty="0">
+                <a:solidFill>
+                  <a:srgbClr val="6B7280"/>
+                </a:solidFill>
+                <a:latin typeface="Calibri"/>
+              </a:rPr>
+              <a:t> Personal · IA 2026 · UTN Santa Fe</a:t>
             </a:r>
           </a:p>
         </p:txBody>
@@ -3721,7 +3930,7 @@
         <p:spPr>
           <a:xfrm>
             <a:off x="502920" y="1280160"/>
-            <a:ext cx="11155680" cy="457200"/>
+            <a:ext cx="11155680" cy="241092"/>
           </a:xfrm>
           <a:prstGeom prst="rect">
             <a:avLst/>
@@ -3729,7 +3938,7 @@
           <a:noFill/>
         </p:spPr>
         <p:txBody>
-          <a:bodyPr wrap="square" anchor="t" lIns="25400" rIns="25400" tIns="12700" bIns="12700">
+          <a:bodyPr wrap="square" lIns="25400" tIns="12700" rIns="25400" bIns="12700" anchor="t">
             <a:spAutoFit/>
           </a:bodyPr>
           <a:lstStyle/>
@@ -3743,16 +3952,106 @@
               </a:spcAft>
             </a:pPr>
             <a:r>
-              <a:rPr sz="1400" b="0">
-                <a:solidFill>
-                  <a:srgbClr val="1F2937"/>
-                </a:solidFill>
-                <a:latin typeface="Calibri"/>
-              </a:rPr>
-              <a:t>Cada épica se desarrolló en su rama </a:t>
-            </a:r>
-            <a:r>
-              <a:rPr sz="1400" b="1">
+              <a:rPr sz="1400" b="0" dirty="0">
+                <a:solidFill>
+                  <a:srgbClr val="1F2937"/>
+                </a:solidFill>
+                <a:latin typeface="Calibri"/>
+              </a:rPr>
+              <a:t>Cada </a:t>
+            </a:r>
+            <a:r>
+              <a:rPr sz="1400" b="0" dirty="0" err="1">
+                <a:solidFill>
+                  <a:srgbClr val="1F2937"/>
+                </a:solidFill>
+                <a:latin typeface="Calibri"/>
+              </a:rPr>
+              <a:t>épica</a:t>
+            </a:r>
+            <a:r>
+              <a:rPr sz="1400" b="0" dirty="0">
+                <a:solidFill>
+                  <a:srgbClr val="1F2937"/>
+                </a:solidFill>
+                <a:latin typeface="Calibri"/>
+              </a:rPr>
+              <a:t> se </a:t>
+            </a:r>
+            <a:r>
+              <a:rPr sz="1400" b="0" dirty="0" err="1">
+                <a:solidFill>
+                  <a:srgbClr val="1F2937"/>
+                </a:solidFill>
+                <a:latin typeface="Calibri"/>
+              </a:rPr>
+              <a:t>desarrolló</a:t>
+            </a:r>
+            <a:r>
+              <a:rPr sz="1400" b="0" dirty="0">
+                <a:solidFill>
+                  <a:srgbClr val="1F2937"/>
+                </a:solidFill>
+                <a:latin typeface="Calibri"/>
+              </a:rPr>
+              <a:t> </a:t>
+            </a:r>
+            <a:r>
+              <a:rPr sz="1400" b="0" dirty="0" err="1">
+                <a:solidFill>
+                  <a:srgbClr val="1F2937"/>
+                </a:solidFill>
+                <a:latin typeface="Calibri"/>
+              </a:rPr>
+              <a:t>en</a:t>
+            </a:r>
+            <a:r>
+              <a:rPr sz="1400" b="0" dirty="0">
+                <a:solidFill>
+                  <a:srgbClr val="1F2937"/>
+                </a:solidFill>
+                <a:latin typeface="Calibri"/>
+              </a:rPr>
+              <a:t> </a:t>
+            </a:r>
+            <a:r>
+              <a:rPr sz="1400" b="0" dirty="0" err="1">
+                <a:solidFill>
+                  <a:srgbClr val="1F2937"/>
+                </a:solidFill>
+                <a:latin typeface="Calibri"/>
+              </a:rPr>
+              <a:t>su</a:t>
+            </a:r>
+            <a:r>
+              <a:rPr sz="1400" b="0" dirty="0">
+                <a:solidFill>
+                  <a:srgbClr val="1F2937"/>
+                </a:solidFill>
+                <a:latin typeface="Calibri"/>
+              </a:rPr>
+              <a:t> </a:t>
+            </a:r>
+            <a:r>
+              <a:rPr sz="1400" b="0" dirty="0" err="1">
+                <a:solidFill>
+                  <a:srgbClr val="1F2937"/>
+                </a:solidFill>
+                <a:latin typeface="Calibri"/>
+              </a:rPr>
+              <a:t>rama</a:t>
+            </a:r>
+            <a:r>
+              <a:rPr sz="1400" b="0" dirty="0">
+                <a:solidFill>
+                  <a:srgbClr val="1F2937"/>
+                </a:solidFill>
+                <a:latin typeface="Calibri"/>
+              </a:rPr>
+              <a:t> </a:t>
+            </a:r>
+            <a:r>
+              <a:rPr sz="1400" b="1" dirty="0">
                 <a:solidFill>
                   <a:srgbClr val="4F46E5"/>
                 </a:solidFill>
@@ -3760,33 +4059,12 @@
               </a:rPr>
               <a:t>feat/epic-XX</a:t>
             </a:r>
-            <a:r>
-              <a:rPr sz="1400" b="0">
-                <a:solidFill>
-                  <a:srgbClr val="1F2937"/>
-                </a:solidFill>
-                <a:latin typeface="Calibri"/>
-              </a:rPr>
-              <a:t> y se integró a </a:t>
-            </a:r>
-            <a:r>
-              <a:rPr sz="1400" b="1">
-                <a:solidFill>
-                  <a:srgbClr val="4F46E5"/>
-                </a:solidFill>
-                <a:latin typeface="Calibri"/>
-              </a:rPr>
-              <a:t>dev</a:t>
-            </a:r>
-            <a:r>
-              <a:rPr sz="1400" b="0">
-                <a:solidFill>
-                  <a:srgbClr val="1F2937"/>
-                </a:solidFill>
-                <a:latin typeface="Calibri"/>
-              </a:rPr>
-              <a:t> mediante Pull Request.</a:t>
-            </a:r>
+            <a:endParaRPr sz="1400" b="0" dirty="0">
+              <a:solidFill>
+                <a:srgbClr val="1F2937"/>
+              </a:solidFill>
+              <a:latin typeface="Calibri"/>
+            </a:endParaRPr>
           </a:p>
         </p:txBody>
       </p:sp>
@@ -3796,7 +4074,13 @@
           <p:cNvGraphicFramePr>
             <a:graphicFrameLocks noGrp="1"/>
           </p:cNvGraphicFramePr>
-          <p:nvPr/>
+          <p:nvPr>
+            <p:extLst>
+              <p:ext uri="{D42A27DB-BD31-4B8C-83A1-F6EECF244321}">
+                <p14:modId xmlns:p14="http://schemas.microsoft.com/office/powerpoint/2010/main" val="82583015"/>
+              </p:ext>
+            </p:extLst>
+          </p:nvPr>
         </p:nvGraphicFramePr>
         <p:xfrm>
           <a:off x="502920" y="1828800"/>
@@ -3809,9 +4093,27 @@
                 <a:tableStyleId>{5C22544A-7EE6-4342-B048-85BDC9FD1C3A}</a:tableStyleId>
               </a:tblPr>
               <a:tblGrid>
-                <a:gridCol w="1280160"/>
-                <a:gridCol w="5120640"/>
-                <a:gridCol w="4754880"/>
+                <a:gridCol w="1280160">
+                  <a:extLst>
+                    <a:ext uri="{9D8B030D-6E8A-4147-A177-3AD203B41FA5}">
+                      <a16:colId xmlns:a16="http://schemas.microsoft.com/office/drawing/2014/main" val="20000"/>
+                    </a:ext>
+                  </a:extLst>
+                </a:gridCol>
+                <a:gridCol w="5120640">
+                  <a:extLst>
+                    <a:ext uri="{9D8B030D-6E8A-4147-A177-3AD203B41FA5}">
+                      <a16:colId xmlns:a16="http://schemas.microsoft.com/office/drawing/2014/main" val="20001"/>
+                    </a:ext>
+                  </a:extLst>
+                </a:gridCol>
+                <a:gridCol w="4754880">
+                  <a:extLst>
+                    <a:ext uri="{9D8B030D-6E8A-4147-A177-3AD203B41FA5}">
+                      <a16:colId xmlns:a16="http://schemas.microsoft.com/office/drawing/2014/main" val="20002"/>
+                    </a:ext>
+                  </a:extLst>
+                </a:gridCol>
               </a:tblGrid>
               <a:tr h="390698">
                 <a:tc>
@@ -3820,7 +4122,7 @@
                     <a:lstStyle/>
                     <a:p>
                       <a:pPr>
-                        <a:defRPr b="1" sz="1300">
+                        <a:defRPr sz="1300" b="1">
                           <a:solidFill>
                             <a:srgbClr val="FFFFFF"/>
                           </a:solidFill>
@@ -3844,7 +4146,7 @@
                     <a:lstStyle/>
                     <a:p>
                       <a:pPr>
-                        <a:defRPr b="1" sz="1300">
+                        <a:defRPr sz="1300" b="1">
                           <a:solidFill>
                             <a:srgbClr val="FFFFFF"/>
                           </a:solidFill>
@@ -3868,7 +4170,7 @@
                     <a:lstStyle/>
                     <a:p>
                       <a:pPr>
-                        <a:defRPr b="1" sz="1300">
+                        <a:defRPr sz="1300" b="1">
                           <a:solidFill>
                             <a:srgbClr val="FFFFFF"/>
                           </a:solidFill>
@@ -3886,6 +4188,11 @@
                     </a:solidFill>
                   </a:tcPr>
                 </a:tc>
+                <a:extLst>
+                  <a:ext uri="{0D108BD9-81ED-4DB2-BD59-A6C34878D82A}">
+                    <a16:rowId xmlns:a16="http://schemas.microsoft.com/office/drawing/2014/main" val="10000"/>
+                  </a:ext>
+                </a:extLst>
               </a:tr>
               <a:tr h="390698">
                 <a:tc>
@@ -3960,6 +4267,11 @@
                     </a:solidFill>
                   </a:tcPr>
                 </a:tc>
+                <a:extLst>
+                  <a:ext uri="{0D108BD9-81ED-4DB2-BD59-A6C34878D82A}">
+                    <a16:rowId xmlns:a16="http://schemas.microsoft.com/office/drawing/2014/main" val="10001"/>
+                  </a:ext>
+                </a:extLst>
               </a:tr>
               <a:tr h="390698">
                 <a:tc>
@@ -4034,6 +4346,11 @@
                     </a:solidFill>
                   </a:tcPr>
                 </a:tc>
+                <a:extLst>
+                  <a:ext uri="{0D108BD9-81ED-4DB2-BD59-A6C34878D82A}">
+                    <a16:rowId xmlns:a16="http://schemas.microsoft.com/office/drawing/2014/main" val="10002"/>
+                  </a:ext>
+                </a:extLst>
               </a:tr>
               <a:tr h="390698">
                 <a:tc>
@@ -4108,6 +4425,11 @@
                     </a:solidFill>
                   </a:tcPr>
                 </a:tc>
+                <a:extLst>
+                  <a:ext uri="{0D108BD9-81ED-4DB2-BD59-A6C34878D82A}">
+                    <a16:rowId xmlns:a16="http://schemas.microsoft.com/office/drawing/2014/main" val="10003"/>
+                  </a:ext>
+                </a:extLst>
               </a:tr>
               <a:tr h="390698">
                 <a:tc>
@@ -4182,6 +4504,11 @@
                     </a:solidFill>
                   </a:tcPr>
                 </a:tc>
+                <a:extLst>
+                  <a:ext uri="{0D108BD9-81ED-4DB2-BD59-A6C34878D82A}">
+                    <a16:rowId xmlns:a16="http://schemas.microsoft.com/office/drawing/2014/main" val="10004"/>
+                  </a:ext>
+                </a:extLst>
               </a:tr>
               <a:tr h="390698">
                 <a:tc>
@@ -4256,6 +4583,11 @@
                     </a:solidFill>
                   </a:tcPr>
                 </a:tc>
+                <a:extLst>
+                  <a:ext uri="{0D108BD9-81ED-4DB2-BD59-A6C34878D82A}">
+                    <a16:rowId xmlns:a16="http://schemas.microsoft.com/office/drawing/2014/main" val="10005"/>
+                  </a:ext>
+                </a:extLst>
               </a:tr>
               <a:tr h="390698">
                 <a:tc>
@@ -4330,6 +4662,11 @@
                     </a:solidFill>
                   </a:tcPr>
                 </a:tc>
+                <a:extLst>
+                  <a:ext uri="{0D108BD9-81ED-4DB2-BD59-A6C34878D82A}">
+                    <a16:rowId xmlns:a16="http://schemas.microsoft.com/office/drawing/2014/main" val="10006"/>
+                  </a:ext>
+                </a:extLst>
               </a:tr>
               <a:tr h="390698">
                 <a:tc>
@@ -4386,16 +4723,22 @@
                     <a:lstStyle/>
                     <a:p>
                       <a:pPr>
-                        <a:defRPr sz="1250" b="1">
+                        <a:defRPr sz="1250" b="0">
                           <a:solidFill>
-                            <a:srgbClr val="10B981"/>
+                            <a:srgbClr val="6B7280"/>
                           </a:solidFill>
                           <a:latin typeface="Calibri"/>
                         </a:defRPr>
                       </a:pPr>
                       <a:r>
-                        <a:t>✅  en dev</a:t>
+                        <a:rPr lang="en-US" dirty="0"/>
+                        <a:t>📋  </a:t>
                       </a:r>
+                      <a:r>
+                        <a:rPr lang="en-US" dirty="0" err="1"/>
+                        <a:t>Pendiente</a:t>
+                      </a:r>
+                      <a:endParaRPr lang="en-US" dirty="0"/>
                     </a:p>
                   </a:txBody>
                   <a:tcPr anchor="ctr">
@@ -4404,6 +4747,11 @@
                     </a:solidFill>
                   </a:tcPr>
                 </a:tc>
+                <a:extLst>
+                  <a:ext uri="{0D108BD9-81ED-4DB2-BD59-A6C34878D82A}">
+                    <a16:rowId xmlns:a16="http://schemas.microsoft.com/office/drawing/2014/main" val="10007"/>
+                  </a:ext>
+                </a:extLst>
               </a:tr>
               <a:tr h="390698">
                 <a:tc>
@@ -4478,6 +4826,11 @@
                     </a:solidFill>
                   </a:tcPr>
                 </a:tc>
+                <a:extLst>
+                  <a:ext uri="{0D108BD9-81ED-4DB2-BD59-A6C34878D82A}">
+                    <a16:rowId xmlns:a16="http://schemas.microsoft.com/office/drawing/2014/main" val="10008"/>
+                  </a:ext>
+                </a:extLst>
               </a:tr>
               <a:tr h="390698">
                 <a:tc>
@@ -4552,6 +4905,11 @@
                     </a:solidFill>
                   </a:tcPr>
                 </a:tc>
+                <a:extLst>
+                  <a:ext uri="{0D108BD9-81ED-4DB2-BD59-A6C34878D82A}">
+                    <a16:rowId xmlns:a16="http://schemas.microsoft.com/office/drawing/2014/main" val="10009"/>
+                  </a:ext>
+                </a:extLst>
               </a:tr>
               <a:tr h="390700">
                 <a:tc>
@@ -4616,8 +4974,14 @@
                         </a:defRPr>
                       </a:pPr>
                       <a:r>
-                        <a:t>📋  identificada · gap a cerrar</a:t>
+                        <a:rPr dirty="0"/>
+                        <a:t>📋  </a:t>
                       </a:r>
+                      <a:r>
+                        <a:rPr lang="en-US" dirty="0" err="1"/>
+                        <a:t>Pendiente</a:t>
+                      </a:r>
+                      <a:endParaRPr dirty="0"/>
                     </a:p>
                   </a:txBody>
                   <a:tcPr anchor="ctr">
@@ -4626,6 +4990,11 @@
                     </a:solidFill>
                   </a:tcPr>
                 </a:tc>
+                <a:extLst>
+                  <a:ext uri="{0D108BD9-81ED-4DB2-BD59-A6C34878D82A}">
+                    <a16:rowId xmlns:a16="http://schemas.microsoft.com/office/drawing/2014/main" val="10010"/>
+                  </a:ext>
+                </a:extLst>
               </a:tr>
             </a:tbl>
           </a:graphicData>
@@ -4640,7 +5009,7 @@
 </file>
 
 <file path=ppt/slides/slide3.xml><?xml version="1.0" encoding="utf-8"?>
-<p:sld xmlns:a="http://schemas.openxmlformats.org/drawingml/2006/main" xmlns:p="http://schemas.openxmlformats.org/presentationml/2006/main" xmlns:r="http://schemas.openxmlformats.org/officeDocument/2006/relationships">
+<p:sld xmlns:a="http://schemas.openxmlformats.org/drawingml/2006/main" xmlns:r="http://schemas.openxmlformats.org/officeDocument/2006/relationships" xmlns:p="http://schemas.openxmlformats.org/presentationml/2006/main">
   <p:cSld>
     <p:spTree>
       <p:nvGrpSpPr>
@@ -4648,7 +5017,14 @@
         <p:cNvGrpSpPr/>
         <p:nvPr/>
       </p:nvGrpSpPr>
-      <p:grpSpPr/>
+      <p:grpSpPr>
+        <a:xfrm>
+          <a:off x="0" y="0"/>
+          <a:ext cx="0" cy="0"/>
+          <a:chOff x="0" y="0"/>
+          <a:chExt cx="0" cy="0"/>
+        </a:xfrm>
+      </p:grpSpPr>
       <p:sp>
         <p:nvSpPr>
           <p:cNvPr id="2" name="Rectangle 1"/>
@@ -4690,6 +5066,7 @@
           <a:lstStyle/>
           <a:p>
             <a:pPr algn="ctr"/>
+            <a:endParaRPr/>
           </a:p>
         </p:txBody>
       </p:sp>
@@ -4734,6 +5111,7 @@
           <a:lstStyle/>
           <a:p>
             <a:pPr algn="ctr"/>
+            <a:endParaRPr/>
           </a:p>
         </p:txBody>
       </p:sp>
@@ -4754,7 +5132,7 @@
           <a:noFill/>
         </p:spPr>
         <p:txBody>
-          <a:bodyPr wrap="square" anchor="t" lIns="25400" rIns="25400" tIns="12700" bIns="12700">
+          <a:bodyPr wrap="square" lIns="25400" tIns="12700" rIns="25400" bIns="12700" anchor="t">
             <a:spAutoFit/>
           </a:bodyPr>
           <a:lstStyle/>
@@ -4796,7 +5174,7 @@
           <a:noFill/>
         </p:spPr>
         <p:txBody>
-          <a:bodyPr wrap="square" anchor="t" lIns="25400" rIns="25400" tIns="12700" bIns="12700">
+          <a:bodyPr wrap="square" lIns="25400" tIns="12700" rIns="25400" bIns="12700" anchor="t">
             <a:spAutoFit/>
           </a:bodyPr>
           <a:lstStyle/>
@@ -4838,7 +5216,7 @@
           <a:noFill/>
         </p:spPr>
         <p:txBody>
-          <a:bodyPr wrap="square" anchor="t" lIns="25400" rIns="25400" tIns="12700" bIns="12700">
+          <a:bodyPr wrap="square" lIns="25400" tIns="12700" rIns="25400" bIns="12700" anchor="t">
             <a:spAutoFit/>
           </a:bodyPr>
           <a:lstStyle/>
@@ -4872,7 +5250,7 @@
         <p:spPr>
           <a:xfrm>
             <a:off x="502920" y="6483096"/>
-            <a:ext cx="8229600" cy="274320"/>
+            <a:ext cx="8229600" cy="164148"/>
           </a:xfrm>
           <a:prstGeom prst="rect">
             <a:avLst/>
@@ -4880,7 +5258,7 @@
           <a:noFill/>
         </p:spPr>
         <p:txBody>
-          <a:bodyPr wrap="square" anchor="t" lIns="25400" rIns="25400" tIns="12700" bIns="12700">
+          <a:bodyPr wrap="square" lIns="25400" tIns="12700" rIns="25400" bIns="12700" anchor="t">
             <a:spAutoFit/>
           </a:bodyPr>
           <a:lstStyle/>
@@ -4894,13 +5272,31 @@
               </a:spcAft>
             </a:pPr>
             <a:r>
-              <a:rPr sz="900" b="0">
+              <a:rPr sz="900" b="0" dirty="0">
                 <a:solidFill>
                   <a:srgbClr val="6B7280"/>
                 </a:solidFill>
                 <a:latin typeface="Calibri"/>
               </a:rPr>
-              <a:t>Tutor Académico Personal · IA 2026 · UTN Santa Fe — CIDISI</a:t>
+              <a:t>Tutor </a:t>
+            </a:r>
+            <a:r>
+              <a:rPr sz="900" b="0" dirty="0" err="1">
+                <a:solidFill>
+                  <a:srgbClr val="6B7280"/>
+                </a:solidFill>
+                <a:latin typeface="Calibri"/>
+              </a:rPr>
+              <a:t>Académico</a:t>
+            </a:r>
+            <a:r>
+              <a:rPr sz="900" b="0" dirty="0">
+                <a:solidFill>
+                  <a:srgbClr val="6B7280"/>
+                </a:solidFill>
+                <a:latin typeface="Calibri"/>
+              </a:rPr>
+              <a:t> Personal · IA 2026 · UTN Santa Fe</a:t>
             </a:r>
           </a:p>
         </p:txBody>
@@ -4946,6 +5342,7 @@
           <a:lstStyle/>
           <a:p>
             <a:pPr algn="ctr"/>
+            <a:endParaRPr/>
           </a:p>
         </p:txBody>
       </p:sp>
@@ -4966,7 +5363,7 @@
           <a:noFill/>
         </p:spPr>
         <p:txBody>
-          <a:bodyPr wrap="square" anchor="ctr" lIns="25400" rIns="25400" tIns="12700" bIns="12700">
+          <a:bodyPr wrap="square" lIns="25400" tIns="12700" rIns="25400" bIns="12700" anchor="ctr">
             <a:spAutoFit/>
           </a:bodyPr>
           <a:lstStyle/>
@@ -5053,6 +5450,7 @@
           <a:lstStyle/>
           <a:p>
             <a:pPr algn="ctr"/>
+            <a:endParaRPr/>
           </a:p>
         </p:txBody>
       </p:sp>
@@ -5097,6 +5495,7 @@
           <a:lstStyle/>
           <a:p>
             <a:pPr algn="ctr"/>
+            <a:endParaRPr/>
           </a:p>
         </p:txBody>
       </p:sp>
@@ -5117,7 +5516,7 @@
           <a:noFill/>
         </p:spPr>
         <p:txBody>
-          <a:bodyPr wrap="square" anchor="t" lIns="25400" rIns="25400" tIns="12700" bIns="12700">
+          <a:bodyPr wrap="square" lIns="25400" tIns="12700" rIns="25400" bIns="12700" anchor="t">
             <a:spAutoFit/>
           </a:bodyPr>
           <a:lstStyle/>
@@ -5159,7 +5558,7 @@
           <a:noFill/>
         </p:spPr>
         <p:txBody>
-          <a:bodyPr wrap="square" anchor="t" lIns="25400" rIns="25400" tIns="12700" bIns="12700">
+          <a:bodyPr wrap="square" lIns="25400" tIns="12700" rIns="25400" bIns="12700" anchor="t">
             <a:spAutoFit/>
           </a:bodyPr>
           <a:lstStyle/>
@@ -5225,6 +5624,7 @@
           <a:lstStyle/>
           <a:p>
             <a:pPr algn="ctr"/>
+            <a:endParaRPr/>
           </a:p>
         </p:txBody>
       </p:sp>
@@ -5271,6 +5671,7 @@
           <a:lstStyle/>
           <a:p>
             <a:pPr algn="ctr"/>
+            <a:endParaRPr/>
           </a:p>
         </p:txBody>
       </p:sp>
@@ -5315,6 +5716,7 @@
           <a:lstStyle/>
           <a:p>
             <a:pPr algn="ctr"/>
+            <a:endParaRPr/>
           </a:p>
         </p:txBody>
       </p:sp>
@@ -5335,7 +5737,7 @@
           <a:noFill/>
         </p:spPr>
         <p:txBody>
-          <a:bodyPr wrap="square" anchor="t" lIns="25400" rIns="25400" tIns="12700" bIns="12700">
+          <a:bodyPr wrap="square" lIns="25400" tIns="12700" rIns="25400" bIns="12700" anchor="t">
             <a:spAutoFit/>
           </a:bodyPr>
           <a:lstStyle/>
@@ -5377,7 +5779,7 @@
           <a:noFill/>
         </p:spPr>
         <p:txBody>
-          <a:bodyPr wrap="square" anchor="t" lIns="25400" rIns="25400" tIns="12700" bIns="12700">
+          <a:bodyPr wrap="square" lIns="25400" tIns="12700" rIns="25400" bIns="12700" anchor="t">
             <a:spAutoFit/>
           </a:bodyPr>
           <a:lstStyle/>
@@ -5443,6 +5845,7 @@
           <a:lstStyle/>
           <a:p>
             <a:pPr algn="ctr"/>
+            <a:endParaRPr/>
           </a:p>
         </p:txBody>
       </p:sp>
@@ -5489,6 +5892,7 @@
           <a:lstStyle/>
           <a:p>
             <a:pPr algn="ctr"/>
+            <a:endParaRPr/>
           </a:p>
         </p:txBody>
       </p:sp>
@@ -5533,6 +5937,7 @@
           <a:lstStyle/>
           <a:p>
             <a:pPr algn="ctr"/>
+            <a:endParaRPr/>
           </a:p>
         </p:txBody>
       </p:sp>
@@ -5553,7 +5958,7 @@
           <a:noFill/>
         </p:spPr>
         <p:txBody>
-          <a:bodyPr wrap="square" anchor="t" lIns="25400" rIns="25400" tIns="12700" bIns="12700">
+          <a:bodyPr wrap="square" lIns="25400" tIns="12700" rIns="25400" bIns="12700" anchor="t">
             <a:spAutoFit/>
           </a:bodyPr>
           <a:lstStyle/>
@@ -5595,7 +6000,7 @@
           <a:noFill/>
         </p:spPr>
         <p:txBody>
-          <a:bodyPr wrap="square" anchor="t" lIns="25400" rIns="25400" tIns="12700" bIns="12700">
+          <a:bodyPr wrap="square" lIns="25400" tIns="12700" rIns="25400" bIns="12700" anchor="t">
             <a:spAutoFit/>
           </a:bodyPr>
           <a:lstStyle/>
@@ -5661,6 +6066,7 @@
           <a:lstStyle/>
           <a:p>
             <a:pPr algn="ctr"/>
+            <a:endParaRPr/>
           </a:p>
         </p:txBody>
       </p:sp>
@@ -5707,6 +6113,7 @@
           <a:lstStyle/>
           <a:p>
             <a:pPr algn="ctr"/>
+            <a:endParaRPr/>
           </a:p>
         </p:txBody>
       </p:sp>
@@ -5751,6 +6158,7 @@
           <a:lstStyle/>
           <a:p>
             <a:pPr algn="ctr"/>
+            <a:endParaRPr/>
           </a:p>
         </p:txBody>
       </p:sp>
@@ -5771,7 +6179,7 @@
           <a:noFill/>
         </p:spPr>
         <p:txBody>
-          <a:bodyPr wrap="square" anchor="t" lIns="25400" rIns="25400" tIns="12700" bIns="12700">
+          <a:bodyPr wrap="square" lIns="25400" tIns="12700" rIns="25400" bIns="12700" anchor="t">
             <a:spAutoFit/>
           </a:bodyPr>
           <a:lstStyle/>
@@ -5813,7 +6221,7 @@
           <a:noFill/>
         </p:spPr>
         <p:txBody>
-          <a:bodyPr wrap="square" anchor="t" lIns="25400" rIns="25400" tIns="12700" bIns="12700">
+          <a:bodyPr wrap="square" lIns="25400" tIns="12700" rIns="25400" bIns="12700" anchor="t">
             <a:spAutoFit/>
           </a:bodyPr>
           <a:lstStyle/>
@@ -5879,6 +6287,7 @@
           <a:lstStyle/>
           <a:p>
             <a:pPr algn="ctr"/>
+            <a:endParaRPr/>
           </a:p>
         </p:txBody>
       </p:sp>
@@ -5925,6 +6334,7 @@
           <a:lstStyle/>
           <a:p>
             <a:pPr algn="ctr"/>
+            <a:endParaRPr/>
           </a:p>
         </p:txBody>
       </p:sp>
@@ -5969,6 +6379,7 @@
           <a:lstStyle/>
           <a:p>
             <a:pPr algn="ctr"/>
+            <a:endParaRPr/>
           </a:p>
         </p:txBody>
       </p:sp>
@@ -5989,7 +6400,7 @@
           <a:noFill/>
         </p:spPr>
         <p:txBody>
-          <a:bodyPr wrap="square" anchor="t" lIns="25400" rIns="25400" tIns="12700" bIns="12700">
+          <a:bodyPr wrap="square" lIns="25400" tIns="12700" rIns="25400" bIns="12700" anchor="t">
             <a:spAutoFit/>
           </a:bodyPr>
           <a:lstStyle/>
@@ -6031,7 +6442,7 @@
           <a:noFill/>
         </p:spPr>
         <p:txBody>
-          <a:bodyPr wrap="square" anchor="t" lIns="25400" rIns="25400" tIns="12700" bIns="12700">
+          <a:bodyPr wrap="square" lIns="25400" tIns="12700" rIns="25400" bIns="12700" anchor="t">
             <a:spAutoFit/>
           </a:bodyPr>
           <a:lstStyle/>
@@ -6097,6 +6508,7 @@
           <a:lstStyle/>
           <a:p>
             <a:pPr algn="ctr"/>
+            <a:endParaRPr/>
           </a:p>
         </p:txBody>
       </p:sp>
@@ -6117,7 +6529,7 @@
           <a:noFill/>
         </p:spPr>
         <p:txBody>
-          <a:bodyPr wrap="square" anchor="t" lIns="25400" rIns="25400" tIns="12700" bIns="12700">
+          <a:bodyPr wrap="square" lIns="25400" tIns="12700" rIns="25400" bIns="12700" anchor="t">
             <a:spAutoFit/>
           </a:bodyPr>
           <a:lstStyle/>
@@ -6131,32 +6543,335 @@
               </a:spcAft>
             </a:pPr>
             <a:r>
-              <a:rPr sz="1300" b="0">
-                <a:solidFill>
-                  <a:srgbClr val="1F2937"/>
-                </a:solidFill>
-                <a:latin typeface="Calibri"/>
-              </a:rPr>
-              <a:t>Cada agente es un </a:t>
-            </a:r>
-            <a:r>
-              <a:rPr sz="1300" b="1">
+              <a:rPr sz="1300" b="0" dirty="0">
+                <a:solidFill>
+                  <a:srgbClr val="1F2937"/>
+                </a:solidFill>
+                <a:latin typeface="Calibri"/>
+              </a:rPr>
+              <a:t>Cada </a:t>
+            </a:r>
+            <a:r>
+              <a:rPr sz="1300" b="0" dirty="0" err="1">
+                <a:solidFill>
+                  <a:srgbClr val="1F2937"/>
+                </a:solidFill>
+                <a:latin typeface="Calibri"/>
+              </a:rPr>
+              <a:t>agente</a:t>
+            </a:r>
+            <a:r>
+              <a:rPr sz="1300" b="0" dirty="0">
+                <a:solidFill>
+                  <a:srgbClr val="1F2937"/>
+                </a:solidFill>
+                <a:latin typeface="Calibri"/>
+              </a:rPr>
+              <a:t> es un </a:t>
+            </a:r>
+            <a:r>
+              <a:rPr sz="1300" b="1" dirty="0" err="1">
                 <a:solidFill>
                   <a:srgbClr val="6D28D9"/>
                 </a:solidFill>
                 <a:latin typeface="Calibri"/>
               </a:rPr>
-              <a:t>StateGraph de LangGraph</a:t>
-            </a:r>
-            <a:r>
-              <a:rPr sz="1300" b="0">
-                <a:solidFill>
-                  <a:srgbClr val="1F2937"/>
-                </a:solidFill>
-                <a:latin typeface="Calibri"/>
-              </a:rPr>
-              <a:t> con su propio flujo de control. El Orchestrator clasifica la intención del usuario y enruta al agente correcto (o planifica tareas compuestas).</a:t>
-            </a:r>
+              <a:t>StateGraph</a:t>
+            </a:r>
+            <a:r>
+              <a:rPr sz="1300" b="1" dirty="0">
+                <a:solidFill>
+                  <a:srgbClr val="6D28D9"/>
+                </a:solidFill>
+                <a:latin typeface="Calibri"/>
+              </a:rPr>
+              <a:t> de </a:t>
+            </a:r>
+            <a:r>
+              <a:rPr sz="1300" b="1" dirty="0" err="1">
+                <a:solidFill>
+                  <a:srgbClr val="6D28D9"/>
+                </a:solidFill>
+                <a:latin typeface="Calibri"/>
+              </a:rPr>
+              <a:t>LangGraph</a:t>
+            </a:r>
+            <a:r>
+              <a:rPr sz="1300" b="0" dirty="0">
+                <a:solidFill>
+                  <a:srgbClr val="1F2937"/>
+                </a:solidFill>
+                <a:latin typeface="Calibri"/>
+              </a:rPr>
+              <a:t> con </a:t>
+            </a:r>
+            <a:r>
+              <a:rPr sz="1300" b="0" dirty="0" err="1">
+                <a:solidFill>
+                  <a:srgbClr val="1F2937"/>
+                </a:solidFill>
+                <a:latin typeface="Calibri"/>
+              </a:rPr>
+              <a:t>su</a:t>
+            </a:r>
+            <a:r>
+              <a:rPr sz="1300" b="0" dirty="0">
+                <a:solidFill>
+                  <a:srgbClr val="1F2937"/>
+                </a:solidFill>
+                <a:latin typeface="Calibri"/>
+              </a:rPr>
+              <a:t> </a:t>
+            </a:r>
+            <a:r>
+              <a:rPr sz="1300" b="0" dirty="0" err="1">
+                <a:solidFill>
+                  <a:srgbClr val="1F2937"/>
+                </a:solidFill>
+                <a:latin typeface="Calibri"/>
+              </a:rPr>
+              <a:t>propio</a:t>
+            </a:r>
+            <a:r>
+              <a:rPr sz="1300" b="0" dirty="0">
+                <a:solidFill>
+                  <a:srgbClr val="1F2937"/>
+                </a:solidFill>
+                <a:latin typeface="Calibri"/>
+              </a:rPr>
+              <a:t> </a:t>
+            </a:r>
+            <a:r>
+              <a:rPr sz="1300" b="0" dirty="0" err="1">
+                <a:solidFill>
+                  <a:srgbClr val="1F2937"/>
+                </a:solidFill>
+                <a:latin typeface="Calibri"/>
+              </a:rPr>
+              <a:t>flujo</a:t>
+            </a:r>
+            <a:r>
+              <a:rPr sz="1300" b="0" dirty="0">
+                <a:solidFill>
+                  <a:srgbClr val="1F2937"/>
+                </a:solidFill>
+                <a:latin typeface="Calibri"/>
+              </a:rPr>
+              <a:t> de control. El Orchestrator </a:t>
+            </a:r>
+            <a:r>
+              <a:rPr sz="1300" b="0" dirty="0" err="1">
+                <a:solidFill>
+                  <a:srgbClr val="1F2937"/>
+                </a:solidFill>
+                <a:latin typeface="Calibri"/>
+              </a:rPr>
+              <a:t>clasifica</a:t>
+            </a:r>
+            <a:r>
+              <a:rPr sz="1300" b="0" dirty="0">
+                <a:solidFill>
+                  <a:srgbClr val="1F2937"/>
+                </a:solidFill>
+                <a:latin typeface="Calibri"/>
+              </a:rPr>
+              <a:t> la </a:t>
+            </a:r>
+            <a:r>
+              <a:rPr sz="1300" b="0" dirty="0" err="1">
+                <a:solidFill>
+                  <a:srgbClr val="1F2937"/>
+                </a:solidFill>
+                <a:latin typeface="Calibri"/>
+              </a:rPr>
+              <a:t>intención</a:t>
+            </a:r>
+            <a:r>
+              <a:rPr sz="1300" b="0" dirty="0">
+                <a:solidFill>
+                  <a:srgbClr val="1F2937"/>
+                </a:solidFill>
+                <a:latin typeface="Calibri"/>
+              </a:rPr>
+              <a:t> del </a:t>
+            </a:r>
+            <a:r>
+              <a:rPr sz="1300" b="0" dirty="0" err="1">
+                <a:solidFill>
+                  <a:srgbClr val="1F2937"/>
+                </a:solidFill>
+                <a:latin typeface="Calibri"/>
+              </a:rPr>
+              <a:t>usuario</a:t>
+            </a:r>
+            <a:r>
+              <a:rPr sz="1300" b="0" dirty="0">
+                <a:solidFill>
+                  <a:srgbClr val="1F2937"/>
+                </a:solidFill>
+                <a:latin typeface="Calibri"/>
+              </a:rPr>
+              <a:t> y </a:t>
+            </a:r>
+            <a:r>
+              <a:rPr sz="1300" b="0" dirty="0" err="1">
+                <a:solidFill>
+                  <a:srgbClr val="1F2937"/>
+                </a:solidFill>
+                <a:latin typeface="Calibri"/>
+              </a:rPr>
+              <a:t>enruta</a:t>
+            </a:r>
+            <a:r>
+              <a:rPr sz="1300" b="0" dirty="0">
+                <a:solidFill>
+                  <a:srgbClr val="1F2937"/>
+                </a:solidFill>
+                <a:latin typeface="Calibri"/>
+              </a:rPr>
+              <a:t> al </a:t>
+            </a:r>
+            <a:r>
+              <a:rPr sz="1300" b="0" dirty="0" err="1">
+                <a:solidFill>
+                  <a:srgbClr val="1F2937"/>
+                </a:solidFill>
+                <a:latin typeface="Calibri"/>
+              </a:rPr>
+              <a:t>agente</a:t>
+            </a:r>
+            <a:r>
+              <a:rPr sz="1300" b="0" dirty="0">
+                <a:solidFill>
+                  <a:srgbClr val="1F2937"/>
+                </a:solidFill>
+                <a:latin typeface="Calibri"/>
+              </a:rPr>
+              <a:t> </a:t>
+            </a:r>
+            <a:r>
+              <a:rPr sz="1300" b="0" dirty="0" err="1">
+                <a:solidFill>
+                  <a:srgbClr val="1F2937"/>
+                </a:solidFill>
+                <a:latin typeface="Calibri"/>
+              </a:rPr>
+              <a:t>correcto</a:t>
+            </a:r>
+            <a:r>
+              <a:rPr sz="1300" b="0" dirty="0">
+                <a:solidFill>
+                  <a:srgbClr val="1F2937"/>
+                </a:solidFill>
+                <a:latin typeface="Calibri"/>
+              </a:rPr>
+              <a:t> (o </a:t>
+            </a:r>
+            <a:r>
+              <a:rPr sz="1300" b="0" dirty="0" err="1">
+                <a:solidFill>
+                  <a:srgbClr val="1F2937"/>
+                </a:solidFill>
+                <a:latin typeface="Calibri"/>
+              </a:rPr>
+              <a:t>planifica</a:t>
+            </a:r>
+            <a:r>
+              <a:rPr sz="1300" b="0" dirty="0">
+                <a:solidFill>
+                  <a:srgbClr val="1F2937"/>
+                </a:solidFill>
+                <a:latin typeface="Calibri"/>
+              </a:rPr>
+              <a:t> </a:t>
+            </a:r>
+            <a:r>
+              <a:rPr sz="1300" b="0" dirty="0" err="1">
+                <a:solidFill>
+                  <a:srgbClr val="1F2937"/>
+                </a:solidFill>
+                <a:latin typeface="Calibri"/>
+              </a:rPr>
+              <a:t>tareas</a:t>
+            </a:r>
+            <a:r>
+              <a:rPr sz="1300" b="0" dirty="0">
+                <a:solidFill>
+                  <a:srgbClr val="1F2937"/>
+                </a:solidFill>
+                <a:latin typeface="Calibri"/>
+              </a:rPr>
+              <a:t> </a:t>
+            </a:r>
+            <a:r>
+              <a:rPr sz="1300" b="0" dirty="0" err="1">
+                <a:solidFill>
+                  <a:srgbClr val="1F2937"/>
+                </a:solidFill>
+                <a:latin typeface="Calibri"/>
+              </a:rPr>
+              <a:t>compuestas</a:t>
+            </a:r>
+            <a:r>
+              <a:rPr sz="1300" b="0" dirty="0">
+                <a:solidFill>
+                  <a:srgbClr val="1F2937"/>
+                </a:solidFill>
+                <a:latin typeface="Calibri"/>
+              </a:rPr>
+              <a:t>).</a:t>
+            </a:r>
+          </a:p>
+        </p:txBody>
+      </p:sp>
+      <p:sp>
+        <p:nvSpPr>
+          <p:cNvPr id="37" name="Rectangle 36">
+            <a:extLst>
+              <a:ext uri="{FF2B5EF4-FFF2-40B4-BE49-F238E27FC236}">
+                <a16:creationId xmlns:a16="http://schemas.microsoft.com/office/drawing/2014/main" id="{EF01C99F-6F9A-A24C-E22A-8A9D98A0693D}"/>
+              </a:ext>
+            </a:extLst>
+          </p:cNvPr>
+          <p:cNvSpPr/>
+          <p:nvPr/>
+        </p:nvSpPr>
+        <p:spPr>
+          <a:xfrm rot="5400000">
+            <a:off x="6159499" y="-1753745"/>
+            <a:ext cx="50800" cy="9169403"/>
+          </a:xfrm>
+          <a:prstGeom prst="rect">
+            <a:avLst/>
+          </a:prstGeom>
+          <a:solidFill>
+            <a:srgbClr val="EEECFB"/>
+          </a:solidFill>
+          <a:ln>
+            <a:noFill/>
+          </a:ln>
+          <a:effectLst/>
+        </p:spPr>
+        <p:style>
+          <a:lnRef idx="1">
+            <a:schemeClr val="accent1"/>
+          </a:lnRef>
+          <a:fillRef idx="3">
+            <a:schemeClr val="accent1"/>
+          </a:fillRef>
+          <a:effectRef idx="2">
+            <a:schemeClr val="accent1"/>
+          </a:effectRef>
+          <a:fontRef idx="minor">
+            <a:schemeClr val="lt1"/>
+          </a:fontRef>
+        </p:style>
+        <p:txBody>
+          <a:bodyPr rtlCol="0" anchor="ctr"/>
+          <a:lstStyle/>
+          <a:p>
+            <a:pPr algn="ctr"/>
+            <a:endParaRPr/>
           </a:p>
         </p:txBody>
       </p:sp>
@@ -6169,7 +6884,7 @@
 </file>
 
 <file path=ppt/slides/slide4.xml><?xml version="1.0" encoding="utf-8"?>
-<p:sld xmlns:a="http://schemas.openxmlformats.org/drawingml/2006/main" xmlns:p="http://schemas.openxmlformats.org/presentationml/2006/main" xmlns:r="http://schemas.openxmlformats.org/officeDocument/2006/relationships">
+<p:sld xmlns:a="http://schemas.openxmlformats.org/drawingml/2006/main" xmlns:r="http://schemas.openxmlformats.org/officeDocument/2006/relationships" xmlns:p="http://schemas.openxmlformats.org/presentationml/2006/main">
   <p:cSld>
     <p:spTree>
       <p:nvGrpSpPr>
@@ -6177,7 +6892,14 @@
         <p:cNvGrpSpPr/>
         <p:nvPr/>
       </p:nvGrpSpPr>
-      <p:grpSpPr/>
+      <p:grpSpPr>
+        <a:xfrm>
+          <a:off x="0" y="0"/>
+          <a:ext cx="0" cy="0"/>
+          <a:chOff x="0" y="0"/>
+          <a:chExt cx="0" cy="0"/>
+        </a:xfrm>
+      </p:grpSpPr>
       <p:sp>
         <p:nvSpPr>
           <p:cNvPr id="2" name="Rectangle 1"/>
@@ -6219,6 +6941,7 @@
           <a:lstStyle/>
           <a:p>
             <a:pPr algn="ctr"/>
+            <a:endParaRPr/>
           </a:p>
         </p:txBody>
       </p:sp>
@@ -6263,6 +6986,7 @@
           <a:lstStyle/>
           <a:p>
             <a:pPr algn="ctr"/>
+            <a:endParaRPr/>
           </a:p>
         </p:txBody>
       </p:sp>
@@ -6283,7 +7007,7 @@
           <a:noFill/>
         </p:spPr>
         <p:txBody>
-          <a:bodyPr wrap="square" anchor="t" lIns="25400" rIns="25400" tIns="12700" bIns="12700">
+          <a:bodyPr wrap="square" lIns="25400" tIns="12700" rIns="25400" bIns="12700" anchor="t">
             <a:spAutoFit/>
           </a:bodyPr>
           <a:lstStyle/>
@@ -6325,7 +7049,7 @@
           <a:noFill/>
         </p:spPr>
         <p:txBody>
-          <a:bodyPr wrap="square" anchor="t" lIns="25400" rIns="25400" tIns="12700" bIns="12700">
+          <a:bodyPr wrap="square" lIns="25400" tIns="12700" rIns="25400" bIns="12700" anchor="t">
             <a:spAutoFit/>
           </a:bodyPr>
           <a:lstStyle/>
@@ -6367,7 +7091,7 @@
           <a:noFill/>
         </p:spPr>
         <p:txBody>
-          <a:bodyPr wrap="square" anchor="t" lIns="25400" rIns="25400" tIns="12700" bIns="12700">
+          <a:bodyPr wrap="square" lIns="25400" tIns="12700" rIns="25400" bIns="12700" anchor="t">
             <a:spAutoFit/>
           </a:bodyPr>
           <a:lstStyle/>
@@ -6401,7 +7125,7 @@
         <p:spPr>
           <a:xfrm>
             <a:off x="502920" y="6483096"/>
-            <a:ext cx="8229600" cy="274320"/>
+            <a:ext cx="8229600" cy="164148"/>
           </a:xfrm>
           <a:prstGeom prst="rect">
             <a:avLst/>
@@ -6409,7 +7133,7 @@
           <a:noFill/>
         </p:spPr>
         <p:txBody>
-          <a:bodyPr wrap="square" anchor="t" lIns="25400" rIns="25400" tIns="12700" bIns="12700">
+          <a:bodyPr wrap="square" lIns="25400" tIns="12700" rIns="25400" bIns="12700" anchor="t">
             <a:spAutoFit/>
           </a:bodyPr>
           <a:lstStyle/>
@@ -6423,13 +7147,31 @@
               </a:spcAft>
             </a:pPr>
             <a:r>
-              <a:rPr sz="900" b="0">
+              <a:rPr sz="900" b="0" dirty="0">
                 <a:solidFill>
                   <a:srgbClr val="6B7280"/>
                 </a:solidFill>
                 <a:latin typeface="Calibri"/>
               </a:rPr>
-              <a:t>Tutor Académico Personal · IA 2026 · UTN Santa Fe — CIDISI</a:t>
+              <a:t>Tutor </a:t>
+            </a:r>
+            <a:r>
+              <a:rPr sz="900" b="0" dirty="0" err="1">
+                <a:solidFill>
+                  <a:srgbClr val="6B7280"/>
+                </a:solidFill>
+                <a:latin typeface="Calibri"/>
+              </a:rPr>
+              <a:t>Académico</a:t>
+            </a:r>
+            <a:r>
+              <a:rPr sz="900" b="0" dirty="0">
+                <a:solidFill>
+                  <a:srgbClr val="6B7280"/>
+                </a:solidFill>
+                <a:latin typeface="Calibri"/>
+              </a:rPr>
+              <a:t> Personal · IA 2026 · UTN Santa Fe</a:t>
             </a:r>
           </a:p>
         </p:txBody>
@@ -6501,6 +7243,7 @@
           <a:lstStyle/>
           <a:p>
             <a:pPr algn="ctr"/>
+            <a:endParaRPr/>
           </a:p>
         </p:txBody>
       </p:sp>
@@ -6521,7 +7264,7 @@
           <a:noFill/>
         </p:spPr>
         <p:txBody>
-          <a:bodyPr wrap="square" anchor="t" lIns="25400" rIns="25400" tIns="12700" bIns="12700">
+          <a:bodyPr wrap="square" lIns="25400" tIns="12700" rIns="25400" bIns="12700" anchor="t">
             <a:spAutoFit/>
           </a:bodyPr>
           <a:lstStyle/>
@@ -6574,7 +7317,7 @@
               </a:spcAft>
             </a:pPr>
             <a:r>
-              <a:rPr b="1" sz="1350">
+              <a:rPr sz="1350" b="1">
                 <a:solidFill>
                   <a:srgbClr val="1F2937"/>
                 </a:solidFill>
@@ -6598,7 +7341,7 @@
               </a:spcAft>
             </a:pPr>
             <a:r>
-              <a:rPr b="1" sz="1350">
+              <a:rPr sz="1350" b="1">
                 <a:solidFill>
                   <a:srgbClr val="1F2937"/>
                 </a:solidFill>
@@ -6622,7 +7365,7 @@
               </a:spcAft>
             </a:pPr>
             <a:r>
-              <a:rPr b="1" sz="1350">
+              <a:rPr sz="1350" b="1">
                 <a:solidFill>
                   <a:srgbClr val="1F2937"/>
                 </a:solidFill>
@@ -6646,7 +7389,7 @@
               </a:spcAft>
             </a:pPr>
             <a:r>
-              <a:rPr b="1" sz="1350">
+              <a:rPr sz="1350" b="1">
                 <a:solidFill>
                   <a:srgbClr val="1F2937"/>
                 </a:solidFill>
@@ -6670,7 +7413,7 @@
               </a:spcAft>
             </a:pPr>
             <a:r>
-              <a:rPr b="1" sz="1350">
+              <a:rPr sz="1350" b="1">
                 <a:solidFill>
                   <a:srgbClr val="1F2937"/>
                 </a:solidFill>
@@ -6685,48 +7428,6 @@
                 </a:solidFill>
               </a:rPr>
               <a:t>redacta la respuesta final al estudiante</a:t>
-            </a:r>
-          </a:p>
-        </p:txBody>
-      </p:sp>
-      <p:sp>
-        <p:nvSpPr>
-          <p:cNvPr id="12" name="TextBox 11"/>
-          <p:cNvSpPr txBox="1"/>
-          <p:nvPr/>
-        </p:nvSpPr>
-        <p:spPr>
-          <a:xfrm>
-            <a:off x="502920" y="6199632"/>
-            <a:ext cx="5486400" cy="274320"/>
-          </a:xfrm>
-          <a:prstGeom prst="rect">
-            <a:avLst/>
-          </a:prstGeom>
-          <a:noFill/>
-        </p:spPr>
-        <p:txBody>
-          <a:bodyPr wrap="square" anchor="t" lIns="25400" rIns="25400" tIns="12700" bIns="12700">
-            <a:spAutoFit/>
-          </a:bodyPr>
-          <a:lstStyle/>
-          <a:p>
-            <a:pPr algn="l">
-              <a:lnSpc>
-                <a:spcPct val="100000"/>
-              </a:lnSpc>
-              <a:spcAft>
-                <a:spcPts val="400"/>
-              </a:spcAft>
-            </a:pPr>
-            <a:r>
-              <a:rPr sz="950" b="0">
-                <a:solidFill>
-                  <a:srgbClr val="6B7280"/>
-                </a:solidFill>
-                <a:latin typeface="Calibri"/>
-              </a:rPr>
-              <a:t>Renderizado del código real en dev (LangGraph .draw_mermaid)</a:t>
             </a:r>
           </a:p>
         </p:txBody>
@@ -6740,7 +7441,7 @@
 </file>
 
 <file path=ppt/slides/slide5.xml><?xml version="1.0" encoding="utf-8"?>
-<p:sld xmlns:a="http://schemas.openxmlformats.org/drawingml/2006/main" xmlns:p="http://schemas.openxmlformats.org/presentationml/2006/main" xmlns:r="http://schemas.openxmlformats.org/officeDocument/2006/relationships">
+<p:sld xmlns:a="http://schemas.openxmlformats.org/drawingml/2006/main" xmlns:r="http://schemas.openxmlformats.org/officeDocument/2006/relationships" xmlns:p="http://schemas.openxmlformats.org/presentationml/2006/main">
   <p:cSld>
     <p:spTree>
       <p:nvGrpSpPr>
@@ -6748,7 +7449,14 @@
         <p:cNvGrpSpPr/>
         <p:nvPr/>
       </p:nvGrpSpPr>
-      <p:grpSpPr/>
+      <p:grpSpPr>
+        <a:xfrm>
+          <a:off x="0" y="0"/>
+          <a:ext cx="0" cy="0"/>
+          <a:chOff x="0" y="0"/>
+          <a:chExt cx="0" cy="0"/>
+        </a:xfrm>
+      </p:grpSpPr>
       <p:sp>
         <p:nvSpPr>
           <p:cNvPr id="2" name="Rectangle 1"/>
@@ -6790,6 +7498,7 @@
           <a:lstStyle/>
           <a:p>
             <a:pPr algn="ctr"/>
+            <a:endParaRPr/>
           </a:p>
         </p:txBody>
       </p:sp>
@@ -6834,6 +7543,7 @@
           <a:lstStyle/>
           <a:p>
             <a:pPr algn="ctr"/>
+            <a:endParaRPr/>
           </a:p>
         </p:txBody>
       </p:sp>
@@ -6854,7 +7564,7 @@
           <a:noFill/>
         </p:spPr>
         <p:txBody>
-          <a:bodyPr wrap="square" anchor="t" lIns="25400" rIns="25400" tIns="12700" bIns="12700">
+          <a:bodyPr wrap="square" lIns="25400" tIns="12700" rIns="25400" bIns="12700" anchor="t">
             <a:spAutoFit/>
           </a:bodyPr>
           <a:lstStyle/>
@@ -6896,7 +7606,7 @@
           <a:noFill/>
         </p:spPr>
         <p:txBody>
-          <a:bodyPr wrap="square" anchor="t" lIns="25400" rIns="25400" tIns="12700" bIns="12700">
+          <a:bodyPr wrap="square" lIns="25400" tIns="12700" rIns="25400" bIns="12700" anchor="t">
             <a:spAutoFit/>
           </a:bodyPr>
           <a:lstStyle/>
@@ -6938,7 +7648,7 @@
           <a:noFill/>
         </p:spPr>
         <p:txBody>
-          <a:bodyPr wrap="square" anchor="t" lIns="25400" rIns="25400" tIns="12700" bIns="12700">
+          <a:bodyPr wrap="square" lIns="25400" tIns="12700" rIns="25400" bIns="12700" anchor="t">
             <a:spAutoFit/>
           </a:bodyPr>
           <a:lstStyle/>
@@ -6972,7 +7682,7 @@
         <p:spPr>
           <a:xfrm>
             <a:off x="502920" y="6483096"/>
-            <a:ext cx="8229600" cy="274320"/>
+            <a:ext cx="8229600" cy="164148"/>
           </a:xfrm>
           <a:prstGeom prst="rect">
             <a:avLst/>
@@ -6980,7 +7690,7 @@
           <a:noFill/>
         </p:spPr>
         <p:txBody>
-          <a:bodyPr wrap="square" anchor="t" lIns="25400" rIns="25400" tIns="12700" bIns="12700">
+          <a:bodyPr wrap="square" lIns="25400" tIns="12700" rIns="25400" bIns="12700" anchor="t">
             <a:spAutoFit/>
           </a:bodyPr>
           <a:lstStyle/>
@@ -6994,13 +7704,31 @@
               </a:spcAft>
             </a:pPr>
             <a:r>
-              <a:rPr sz="900" b="0">
+              <a:rPr sz="900" b="0" dirty="0">
                 <a:solidFill>
                   <a:srgbClr val="6B7280"/>
                 </a:solidFill>
                 <a:latin typeface="Calibri"/>
               </a:rPr>
-              <a:t>Tutor Académico Personal · IA 2026 · UTN Santa Fe — CIDISI</a:t>
+              <a:t>Tutor </a:t>
+            </a:r>
+            <a:r>
+              <a:rPr sz="900" b="0" dirty="0" err="1">
+                <a:solidFill>
+                  <a:srgbClr val="6B7280"/>
+                </a:solidFill>
+                <a:latin typeface="Calibri"/>
+              </a:rPr>
+              <a:t>Académico</a:t>
+            </a:r>
+            <a:r>
+              <a:rPr sz="900" b="0" dirty="0">
+                <a:solidFill>
+                  <a:srgbClr val="6B7280"/>
+                </a:solidFill>
+                <a:latin typeface="Calibri"/>
+              </a:rPr>
+              <a:t> Personal · IA 2026 · UTN Santa Fe </a:t>
             </a:r>
           </a:p>
         </p:txBody>
@@ -7022,7 +7750,7 @@
           <a:noFill/>
         </p:spPr>
         <p:txBody>
-          <a:bodyPr wrap="square" anchor="t" lIns="25400" rIns="25400" tIns="12700" bIns="12700">
+          <a:bodyPr wrap="square" lIns="25400" tIns="12700" rIns="25400" bIns="12700" anchor="t">
             <a:spAutoFit/>
           </a:bodyPr>
           <a:lstStyle/>
@@ -7088,7 +7816,7 @@
           <a:noFill/>
         </p:spPr>
         <p:txBody>
-          <a:bodyPr wrap="square" anchor="t" lIns="25400" rIns="25400" tIns="12700" bIns="12700">
+          <a:bodyPr wrap="square" lIns="25400" tIns="12700" rIns="25400" bIns="12700" anchor="t">
             <a:spAutoFit/>
           </a:bodyPr>
           <a:lstStyle/>
@@ -7130,7 +7858,7 @@
           <a:noFill/>
         </p:spPr>
         <p:txBody>
-          <a:bodyPr wrap="square" anchor="t" lIns="25400" rIns="25400" tIns="12700" bIns="12700">
+          <a:bodyPr wrap="square" lIns="25400" tIns="12700" rIns="25400" bIns="12700" anchor="t">
             <a:spAutoFit/>
           </a:bodyPr>
           <a:lstStyle/>
@@ -7196,7 +7924,7 @@
           <a:noFill/>
         </p:spPr>
         <p:txBody>
-          <a:bodyPr wrap="square" anchor="t" lIns="25400" rIns="25400" tIns="12700" bIns="12700">
+          <a:bodyPr wrap="square" lIns="25400" tIns="12700" rIns="25400" bIns="12700" anchor="t">
             <a:spAutoFit/>
           </a:bodyPr>
           <a:lstStyle/>
@@ -7238,7 +7966,7 @@
           <a:noFill/>
         </p:spPr>
         <p:txBody>
-          <a:bodyPr wrap="square" anchor="t" lIns="25400" rIns="25400" tIns="12700" bIns="12700">
+          <a:bodyPr wrap="square" lIns="25400" tIns="12700" rIns="25400" bIns="12700" anchor="t">
             <a:spAutoFit/>
           </a:bodyPr>
           <a:lstStyle/>
@@ -7304,7 +8032,7 @@
           <a:noFill/>
         </p:spPr>
         <p:txBody>
-          <a:bodyPr wrap="square" anchor="t" lIns="25400" rIns="25400" tIns="12700" bIns="12700">
+          <a:bodyPr wrap="square" lIns="25400" tIns="12700" rIns="25400" bIns="12700" anchor="t">
             <a:spAutoFit/>
           </a:bodyPr>
           <a:lstStyle/>
@@ -7338,7 +8066,7 @@
 </file>
 
 <file path=ppt/slides/slide6.xml><?xml version="1.0" encoding="utf-8"?>
-<p:sld xmlns:a="http://schemas.openxmlformats.org/drawingml/2006/main" xmlns:p="http://schemas.openxmlformats.org/presentationml/2006/main" xmlns:r="http://schemas.openxmlformats.org/officeDocument/2006/relationships">
+<p:sld xmlns:a="http://schemas.openxmlformats.org/drawingml/2006/main" xmlns:r="http://schemas.openxmlformats.org/officeDocument/2006/relationships" xmlns:p="http://schemas.openxmlformats.org/presentationml/2006/main">
   <p:cSld>
     <p:spTree>
       <p:nvGrpSpPr>
@@ -7346,7 +8074,14 @@
         <p:cNvGrpSpPr/>
         <p:nvPr/>
       </p:nvGrpSpPr>
-      <p:grpSpPr/>
+      <p:grpSpPr>
+        <a:xfrm>
+          <a:off x="0" y="0"/>
+          <a:ext cx="0" cy="0"/>
+          <a:chOff x="0" y="0"/>
+          <a:chExt cx="0" cy="0"/>
+        </a:xfrm>
+      </p:grpSpPr>
       <p:sp>
         <p:nvSpPr>
           <p:cNvPr id="2" name="Rectangle 1"/>
@@ -7388,6 +8123,7 @@
           <a:lstStyle/>
           <a:p>
             <a:pPr algn="ctr"/>
+            <a:endParaRPr/>
           </a:p>
         </p:txBody>
       </p:sp>
@@ -7432,6 +8168,7 @@
           <a:lstStyle/>
           <a:p>
             <a:pPr algn="ctr"/>
+            <a:endParaRPr/>
           </a:p>
         </p:txBody>
       </p:sp>
@@ -7452,7 +8189,7 @@
           <a:noFill/>
         </p:spPr>
         <p:txBody>
-          <a:bodyPr wrap="square" anchor="t" lIns="25400" rIns="25400" tIns="12700" bIns="12700">
+          <a:bodyPr wrap="square" lIns="25400" tIns="12700" rIns="25400" bIns="12700" anchor="t">
             <a:spAutoFit/>
           </a:bodyPr>
           <a:lstStyle/>
@@ -7494,7 +8231,7 @@
           <a:noFill/>
         </p:spPr>
         <p:txBody>
-          <a:bodyPr wrap="square" anchor="t" lIns="25400" rIns="25400" tIns="12700" bIns="12700">
+          <a:bodyPr wrap="square" lIns="25400" tIns="12700" rIns="25400" bIns="12700" anchor="t">
             <a:spAutoFit/>
           </a:bodyPr>
           <a:lstStyle/>
@@ -7536,7 +8273,7 @@
           <a:noFill/>
         </p:spPr>
         <p:txBody>
-          <a:bodyPr wrap="square" anchor="t" lIns="25400" rIns="25400" tIns="12700" bIns="12700">
+          <a:bodyPr wrap="square" lIns="25400" tIns="12700" rIns="25400" bIns="12700" anchor="t">
             <a:spAutoFit/>
           </a:bodyPr>
           <a:lstStyle/>
@@ -7570,7 +8307,7 @@
         <p:spPr>
           <a:xfrm>
             <a:off x="502920" y="6483096"/>
-            <a:ext cx="8229600" cy="274320"/>
+            <a:ext cx="8229600" cy="164148"/>
           </a:xfrm>
           <a:prstGeom prst="rect">
             <a:avLst/>
@@ -7578,7 +8315,7 @@
           <a:noFill/>
         </p:spPr>
         <p:txBody>
-          <a:bodyPr wrap="square" anchor="t" lIns="25400" rIns="25400" tIns="12700" bIns="12700">
+          <a:bodyPr wrap="square" lIns="25400" tIns="12700" rIns="25400" bIns="12700" anchor="t">
             <a:spAutoFit/>
           </a:bodyPr>
           <a:lstStyle/>
@@ -7592,13 +8329,31 @@
               </a:spcAft>
             </a:pPr>
             <a:r>
-              <a:rPr sz="900" b="0">
+              <a:rPr sz="900" b="0" dirty="0">
                 <a:solidFill>
                   <a:srgbClr val="6B7280"/>
                 </a:solidFill>
                 <a:latin typeface="Calibri"/>
               </a:rPr>
-              <a:t>Tutor Académico Personal · IA 2026 · UTN Santa Fe — CIDISI</a:t>
+              <a:t>Tutor </a:t>
+            </a:r>
+            <a:r>
+              <a:rPr sz="900" b="0" dirty="0" err="1">
+                <a:solidFill>
+                  <a:srgbClr val="6B7280"/>
+                </a:solidFill>
+                <a:latin typeface="Calibri"/>
+              </a:rPr>
+              <a:t>Académico</a:t>
+            </a:r>
+            <a:r>
+              <a:rPr sz="900" b="0" dirty="0">
+                <a:solidFill>
+                  <a:srgbClr val="6B7280"/>
+                </a:solidFill>
+                <a:latin typeface="Calibri"/>
+              </a:rPr>
+              <a:t> Personal · IA 2026 · UTN Santa Fe</a:t>
             </a:r>
           </a:p>
         </p:txBody>
@@ -7620,7 +8375,7 @@
           <a:noFill/>
         </p:spPr>
         <p:txBody>
-          <a:bodyPr wrap="square" anchor="t" lIns="25400" rIns="25400" tIns="12700" bIns="12700">
+          <a:bodyPr wrap="square" lIns="25400" tIns="12700" rIns="25400" bIns="12700" anchor="t">
             <a:spAutoFit/>
           </a:bodyPr>
           <a:lstStyle/>
@@ -7686,7 +8441,7 @@
           <a:noFill/>
         </p:spPr>
         <p:txBody>
-          <a:bodyPr wrap="square" anchor="t" lIns="25400" rIns="25400" tIns="12700" bIns="12700">
+          <a:bodyPr wrap="square" lIns="25400" tIns="12700" rIns="25400" bIns="12700" anchor="t">
             <a:spAutoFit/>
           </a:bodyPr>
           <a:lstStyle/>
@@ -7778,6 +8533,7 @@
           <a:lstStyle/>
           <a:p>
             <a:pPr algn="ctr"/>
+            <a:endParaRPr/>
           </a:p>
         </p:txBody>
       </p:sp>
@@ -7798,7 +8554,7 @@
           <a:noFill/>
         </p:spPr>
         <p:txBody>
-          <a:bodyPr wrap="square" anchor="t" lIns="25400" rIns="25400" tIns="12700" bIns="12700">
+          <a:bodyPr wrap="square" lIns="25400" tIns="12700" rIns="25400" bIns="12700" anchor="t">
             <a:spAutoFit/>
           </a:bodyPr>
           <a:lstStyle/>
@@ -7851,7 +8607,7 @@
               </a:spcAft>
             </a:pPr>
             <a:r>
-              <a:rPr b="1" sz="1300">
+              <a:rPr sz="1300" b="1">
                 <a:solidFill>
                   <a:srgbClr val="1F2937"/>
                 </a:solidFill>
@@ -7875,7 +8631,7 @@
               </a:spcAft>
             </a:pPr>
             <a:r>
-              <a:rPr b="1" sz="1300">
+              <a:rPr sz="1300" b="1">
                 <a:solidFill>
                   <a:srgbClr val="1F2937"/>
                 </a:solidFill>
@@ -7899,7 +8655,7 @@
               </a:spcAft>
             </a:pPr>
             <a:r>
-              <a:rPr b="1" sz="1300">
+              <a:rPr sz="1300" b="1">
                 <a:solidFill>
                   <a:srgbClr val="1F2937"/>
                 </a:solidFill>
@@ -7927,7 +8683,7 @@
 </file>
 
 <file path=ppt/slides/slide7.xml><?xml version="1.0" encoding="utf-8"?>
-<p:sld xmlns:a="http://schemas.openxmlformats.org/drawingml/2006/main" xmlns:p="http://schemas.openxmlformats.org/presentationml/2006/main" xmlns:r="http://schemas.openxmlformats.org/officeDocument/2006/relationships">
+<p:sld xmlns:a="http://schemas.openxmlformats.org/drawingml/2006/main" xmlns:r="http://schemas.openxmlformats.org/officeDocument/2006/relationships" xmlns:p="http://schemas.openxmlformats.org/presentationml/2006/main">
   <p:cSld>
     <p:spTree>
       <p:nvGrpSpPr>
@@ -7935,7 +8691,14 @@
         <p:cNvGrpSpPr/>
         <p:nvPr/>
       </p:nvGrpSpPr>
-      <p:grpSpPr/>
+      <p:grpSpPr>
+        <a:xfrm>
+          <a:off x="0" y="0"/>
+          <a:ext cx="0" cy="0"/>
+          <a:chOff x="0" y="0"/>
+          <a:chExt cx="0" cy="0"/>
+        </a:xfrm>
+      </p:grpSpPr>
       <p:sp>
         <p:nvSpPr>
           <p:cNvPr id="2" name="Rectangle 1"/>
@@ -7977,6 +8740,7 @@
           <a:lstStyle/>
           <a:p>
             <a:pPr algn="ctr"/>
+            <a:endParaRPr/>
           </a:p>
         </p:txBody>
       </p:sp>
@@ -8021,6 +8785,7 @@
           <a:lstStyle/>
           <a:p>
             <a:pPr algn="ctr"/>
+            <a:endParaRPr/>
           </a:p>
         </p:txBody>
       </p:sp>
@@ -8041,7 +8806,7 @@
           <a:noFill/>
         </p:spPr>
         <p:txBody>
-          <a:bodyPr wrap="square" anchor="t" lIns="25400" rIns="25400" tIns="12700" bIns="12700">
+          <a:bodyPr wrap="square" lIns="25400" tIns="12700" rIns="25400" bIns="12700" anchor="t">
             <a:spAutoFit/>
           </a:bodyPr>
           <a:lstStyle/>
@@ -8083,7 +8848,7 @@
           <a:noFill/>
         </p:spPr>
         <p:txBody>
-          <a:bodyPr wrap="square" anchor="t" lIns="25400" rIns="25400" tIns="12700" bIns="12700">
+          <a:bodyPr wrap="square" lIns="25400" tIns="12700" rIns="25400" bIns="12700" anchor="t">
             <a:spAutoFit/>
           </a:bodyPr>
           <a:lstStyle/>
@@ -8125,7 +8890,7 @@
           <a:noFill/>
         </p:spPr>
         <p:txBody>
-          <a:bodyPr wrap="square" anchor="t" lIns="25400" rIns="25400" tIns="12700" bIns="12700">
+          <a:bodyPr wrap="square" lIns="25400" tIns="12700" rIns="25400" bIns="12700" anchor="t">
             <a:spAutoFit/>
           </a:bodyPr>
           <a:lstStyle/>
@@ -8159,7 +8924,7 @@
         <p:spPr>
           <a:xfrm>
             <a:off x="502920" y="6483096"/>
-            <a:ext cx="8229600" cy="274320"/>
+            <a:ext cx="8229600" cy="164148"/>
           </a:xfrm>
           <a:prstGeom prst="rect">
             <a:avLst/>
@@ -8167,7 +8932,7 @@
           <a:noFill/>
         </p:spPr>
         <p:txBody>
-          <a:bodyPr wrap="square" anchor="t" lIns="25400" rIns="25400" tIns="12700" bIns="12700">
+          <a:bodyPr wrap="square" lIns="25400" tIns="12700" rIns="25400" bIns="12700" anchor="t">
             <a:spAutoFit/>
           </a:bodyPr>
           <a:lstStyle/>
@@ -8181,13 +8946,31 @@
               </a:spcAft>
             </a:pPr>
             <a:r>
-              <a:rPr sz="900" b="0">
+              <a:rPr sz="900" b="0" dirty="0">
                 <a:solidFill>
                   <a:srgbClr val="6B7280"/>
                 </a:solidFill>
                 <a:latin typeface="Calibri"/>
               </a:rPr>
-              <a:t>Tutor Académico Personal · IA 2026 · UTN Santa Fe — CIDISI</a:t>
+              <a:t>Tutor </a:t>
+            </a:r>
+            <a:r>
+              <a:rPr sz="900" b="0" dirty="0" err="1">
+                <a:solidFill>
+                  <a:srgbClr val="6B7280"/>
+                </a:solidFill>
+                <a:latin typeface="Calibri"/>
+              </a:rPr>
+              <a:t>Académico</a:t>
+            </a:r>
+            <a:r>
+              <a:rPr sz="900" b="0" dirty="0">
+                <a:solidFill>
+                  <a:srgbClr val="6B7280"/>
+                </a:solidFill>
+                <a:latin typeface="Calibri"/>
+              </a:rPr>
+              <a:t> Personal · IA 2026 · UTN Santa Fe</a:t>
             </a:r>
           </a:p>
         </p:txBody>
@@ -8259,6 +9042,7 @@
           <a:lstStyle/>
           <a:p>
             <a:pPr algn="ctr"/>
+            <a:endParaRPr/>
           </a:p>
         </p:txBody>
       </p:sp>
@@ -8279,7 +9063,7 @@
           <a:noFill/>
         </p:spPr>
         <p:txBody>
-          <a:bodyPr wrap="square" anchor="t" lIns="25400" rIns="25400" tIns="12700" bIns="12700">
+          <a:bodyPr wrap="square" lIns="25400" tIns="12700" rIns="25400" bIns="12700" anchor="t">
             <a:spAutoFit/>
           </a:bodyPr>
           <a:lstStyle/>
@@ -8313,7 +9097,7 @@
         <p:spPr>
           <a:xfrm>
             <a:off x="8732520" y="2148840"/>
-            <a:ext cx="2788920" cy="3657600"/>
+            <a:ext cx="2788920" cy="1923604"/>
           </a:xfrm>
           <a:prstGeom prst="rect">
             <a:avLst/>
@@ -8332,7 +9116,7 @@
               </a:spcAft>
             </a:pPr>
             <a:r>
-              <a:rPr b="1" sz="1200">
+              <a:rPr sz="1200" b="1" dirty="0">
                 <a:solidFill>
                   <a:srgbClr val="8B5CF6"/>
                 </a:solidFill>
@@ -8340,12 +9124,92 @@
               <a:t>• </a:t>
             </a:r>
             <a:r>
-              <a:rPr sz="1150">
-                <a:solidFill>
-                  <a:srgbClr val="1F2937"/>
-                </a:solidFill>
-              </a:rPr>
-              <a:t>Un pedido real disparó el flujo completo de extremo a extremo.</a:t>
+              <a:rPr sz="1150" dirty="0">
+                <a:solidFill>
+                  <a:srgbClr val="1F2937"/>
+                </a:solidFill>
+              </a:rPr>
+              <a:t>Un </a:t>
+            </a:r>
+            <a:r>
+              <a:rPr sz="1150" dirty="0" err="1">
+                <a:solidFill>
+                  <a:srgbClr val="1F2937"/>
+                </a:solidFill>
+              </a:rPr>
+              <a:t>pedido</a:t>
+            </a:r>
+            <a:r>
+              <a:rPr sz="1150" dirty="0">
+                <a:solidFill>
+                  <a:srgbClr val="1F2937"/>
+                </a:solidFill>
+              </a:rPr>
+              <a:t> real </a:t>
+            </a:r>
+            <a:r>
+              <a:rPr sz="1150" dirty="0" err="1">
+                <a:solidFill>
+                  <a:srgbClr val="1F2937"/>
+                </a:solidFill>
+              </a:rPr>
+              <a:t>disparó</a:t>
+            </a:r>
+            <a:r>
+              <a:rPr sz="1150" dirty="0">
+                <a:solidFill>
+                  <a:srgbClr val="1F2937"/>
+                </a:solidFill>
+              </a:rPr>
+              <a:t> </a:t>
+            </a:r>
+            <a:r>
+              <a:rPr sz="1150" dirty="0" err="1">
+                <a:solidFill>
+                  <a:srgbClr val="1F2937"/>
+                </a:solidFill>
+              </a:rPr>
+              <a:t>el</a:t>
+            </a:r>
+            <a:r>
+              <a:rPr sz="1150" dirty="0">
+                <a:solidFill>
+                  <a:srgbClr val="1F2937"/>
+                </a:solidFill>
+              </a:rPr>
+              <a:t> </a:t>
+            </a:r>
+            <a:r>
+              <a:rPr sz="1150" dirty="0" err="1">
+                <a:solidFill>
+                  <a:srgbClr val="1F2937"/>
+                </a:solidFill>
+              </a:rPr>
+              <a:t>flujo</a:t>
+            </a:r>
+            <a:r>
+              <a:rPr sz="1150" dirty="0">
+                <a:solidFill>
+                  <a:srgbClr val="1F2937"/>
+                </a:solidFill>
+              </a:rPr>
+              <a:t> </a:t>
+            </a:r>
+            <a:r>
+              <a:rPr sz="1150" dirty="0" err="1">
+                <a:solidFill>
+                  <a:srgbClr val="1F2937"/>
+                </a:solidFill>
+              </a:rPr>
+              <a:t>completo</a:t>
+            </a:r>
+            <a:r>
+              <a:rPr sz="1150" dirty="0">
+                <a:solidFill>
+                  <a:srgbClr val="1F2937"/>
+                </a:solidFill>
+              </a:rPr>
+              <a:t> de extremo a extremo.</a:t>
             </a:r>
           </a:p>
           <a:p>
@@ -8355,7 +9219,7 @@
               </a:spcAft>
             </a:pPr>
             <a:r>
-              <a:rPr b="1" sz="1200">
+              <a:rPr sz="1200" b="1" dirty="0">
                 <a:solidFill>
                   <a:srgbClr val="8B5CF6"/>
                 </a:solidFill>
@@ -8363,12 +9227,68 @@
               <a:t>• </a:t>
             </a:r>
             <a:r>
-              <a:rPr sz="1150">
-                <a:solidFill>
-                  <a:srgbClr val="1F2937"/>
-                </a:solidFill>
-              </a:rPr>
-              <a:t>classify_intent → plan_composite → execute_step → generate_exam.</a:t>
+              <a:rPr sz="1150" dirty="0" err="1">
+                <a:solidFill>
+                  <a:srgbClr val="1F2937"/>
+                </a:solidFill>
+              </a:rPr>
+              <a:t>classify_intent</a:t>
+            </a:r>
+            <a:r>
+              <a:rPr sz="1150" dirty="0">
+                <a:solidFill>
+                  <a:srgbClr val="1F2937"/>
+                </a:solidFill>
+              </a:rPr>
+              <a:t> → </a:t>
+            </a:r>
+            <a:r>
+              <a:rPr sz="1150" dirty="0" err="1">
+                <a:solidFill>
+                  <a:srgbClr val="1F2937"/>
+                </a:solidFill>
+              </a:rPr>
+              <a:t>plan_composite</a:t>
+            </a:r>
+            <a:r>
+              <a:rPr sz="1150" dirty="0">
+                <a:solidFill>
+                  <a:srgbClr val="1F2937"/>
+                </a:solidFill>
+              </a:rPr>
+              <a:t> → </a:t>
+            </a:r>
+            <a:r>
+              <a:rPr sz="1150" dirty="0" err="1">
+                <a:solidFill>
+                  <a:srgbClr val="1F2937"/>
+                </a:solidFill>
+              </a:rPr>
+              <a:t>execute_step</a:t>
+            </a:r>
+            <a:r>
+              <a:rPr sz="1150" dirty="0">
+                <a:solidFill>
+                  <a:srgbClr val="1F2937"/>
+                </a:solidFill>
+              </a:rPr>
+              <a:t> → </a:t>
+            </a:r>
+            <a:r>
+              <a:rPr sz="1150" dirty="0" err="1">
+                <a:solidFill>
+                  <a:srgbClr val="1F2937"/>
+                </a:solidFill>
+              </a:rPr>
+              <a:t>generate_exam</a:t>
+            </a:r>
+            <a:r>
+              <a:rPr sz="1150" dirty="0">
+                <a:solidFill>
+                  <a:srgbClr val="1F2937"/>
+                </a:solidFill>
+              </a:rPr>
+              <a:t>.</a:t>
             </a:r>
           </a:p>
           <a:p>
@@ -8378,7 +9298,7 @@
               </a:spcAft>
             </a:pPr>
             <a:r>
-              <a:rPr b="1" sz="1200">
+              <a:rPr sz="1200" b="1" dirty="0">
                 <a:solidFill>
                   <a:srgbClr val="8B5CF6"/>
                 </a:solidFill>
@@ -8386,12 +9306,100 @@
               <a:t>• </a:t>
             </a:r>
             <a:r>
-              <a:rPr sz="1150">
-                <a:solidFill>
-                  <a:srgbClr val="1F2937"/>
-                </a:solidFill>
-              </a:rPr>
-              <a:t>generate_exam abre su propio sub-grafo LangGraph.</a:t>
+              <a:rPr sz="1150" dirty="0" err="1">
+                <a:solidFill>
+                  <a:srgbClr val="1F2937"/>
+                </a:solidFill>
+              </a:rPr>
+              <a:t>generate_exam</a:t>
+            </a:r>
+            <a:r>
+              <a:rPr sz="1150" dirty="0">
+                <a:solidFill>
+                  <a:srgbClr val="1F2937"/>
+                </a:solidFill>
+              </a:rPr>
+              <a:t> </a:t>
+            </a:r>
+            <a:r>
+              <a:rPr sz="1150" dirty="0" err="1">
+                <a:solidFill>
+                  <a:srgbClr val="1F2937"/>
+                </a:solidFill>
+              </a:rPr>
+              <a:t>abre</a:t>
+            </a:r>
+            <a:r>
+              <a:rPr sz="1150" dirty="0">
+                <a:solidFill>
+                  <a:srgbClr val="1F2937"/>
+                </a:solidFill>
+              </a:rPr>
+              <a:t> </a:t>
+            </a:r>
+            <a:r>
+              <a:rPr sz="1150" dirty="0" err="1">
+                <a:solidFill>
+                  <a:srgbClr val="1F2937"/>
+                </a:solidFill>
+              </a:rPr>
+              <a:t>su</a:t>
+            </a:r>
+            <a:r>
+              <a:rPr sz="1150" dirty="0">
+                <a:solidFill>
+                  <a:srgbClr val="1F2937"/>
+                </a:solidFill>
+              </a:rPr>
+              <a:t> </a:t>
+            </a:r>
+            <a:r>
+              <a:rPr sz="1150" dirty="0" err="1">
+                <a:solidFill>
+                  <a:srgbClr val="1F2937"/>
+                </a:solidFill>
+              </a:rPr>
+              <a:t>propio</a:t>
+            </a:r>
+            <a:r>
+              <a:rPr sz="1150" dirty="0">
+                <a:solidFill>
+                  <a:srgbClr val="1F2937"/>
+                </a:solidFill>
+              </a:rPr>
+              <a:t> sub-</a:t>
+            </a:r>
+            <a:r>
+              <a:rPr sz="1150" dirty="0" err="1">
+                <a:solidFill>
+                  <a:srgbClr val="1F2937"/>
+                </a:solidFill>
+              </a:rPr>
+              <a:t>grafo</a:t>
+            </a:r>
+            <a:r>
+              <a:rPr sz="1150" dirty="0">
+                <a:solidFill>
+                  <a:srgbClr val="1F2937"/>
+                </a:solidFill>
+              </a:rPr>
+              <a:t> </a:t>
+            </a:r>
+            <a:r>
+              <a:rPr sz="1150" dirty="0" err="1">
+                <a:solidFill>
+                  <a:srgbClr val="1F2937"/>
+                </a:solidFill>
+              </a:rPr>
+              <a:t>LangGraph</a:t>
+            </a:r>
+            <a:r>
+              <a:rPr sz="1150" dirty="0">
+                <a:solidFill>
+                  <a:srgbClr val="1F2937"/>
+                </a:solidFill>
+              </a:rPr>
+              <a:t>.</a:t>
             </a:r>
           </a:p>
           <a:p>
@@ -8401,7 +9409,7 @@
               </a:spcAft>
             </a:pPr>
             <a:r>
-              <a:rPr b="1" sz="1200">
+              <a:rPr sz="1200" b="1" dirty="0">
                 <a:solidFill>
                   <a:srgbClr val="8B5CF6"/>
                 </a:solidFill>
@@ -8409,35 +9417,76 @@
               <a:t>• </a:t>
             </a:r>
             <a:r>
-              <a:rPr sz="1150">
-                <a:solidFill>
-                  <a:srgbClr val="1F2937"/>
-                </a:solidFill>
-              </a:rPr>
-              <a:t>Adentro: retrieve_chunks → rag_retrieve (RAG real sobre ChromaDB).</a:t>
-            </a:r>
-          </a:p>
-          <a:p>
-            <a:pPr>
-              <a:spcAft>
-                <a:spcPts val="1000"/>
-              </a:spcAft>
-            </a:pPr>
-            <a:r>
-              <a:rPr b="1" sz="1200">
-                <a:solidFill>
-                  <a:srgbClr val="8B5CF6"/>
-                </a:solidFill>
-              </a:rPr>
-              <a:t>• </a:t>
-            </a:r>
-            <a:r>
-              <a:rPr sz="1150">
-                <a:solidFill>
-                  <a:srgbClr val="1F2937"/>
-                </a:solidFill>
-              </a:rPr>
-              <a:t>63 observaciones trazadas en esta sola corrida.</a:t>
+              <a:rPr sz="1150" dirty="0">
+                <a:solidFill>
+                  <a:srgbClr val="1F2937"/>
+                </a:solidFill>
+              </a:rPr>
+              <a:t>Adentro: </a:t>
+            </a:r>
+            <a:r>
+              <a:rPr sz="1150" dirty="0" err="1">
+                <a:solidFill>
+                  <a:srgbClr val="1F2937"/>
+                </a:solidFill>
+              </a:rPr>
+              <a:t>retrieve_chunks</a:t>
+            </a:r>
+            <a:r>
+              <a:rPr sz="1150" dirty="0">
+                <a:solidFill>
+                  <a:srgbClr val="1F2937"/>
+                </a:solidFill>
+              </a:rPr>
+              <a:t> → </a:t>
+            </a:r>
+            <a:r>
+              <a:rPr sz="1150" dirty="0" err="1">
+                <a:solidFill>
+                  <a:srgbClr val="1F2937"/>
+                </a:solidFill>
+              </a:rPr>
+              <a:t>rag_retrieve</a:t>
+            </a:r>
+            <a:r>
+              <a:rPr sz="1150" dirty="0">
+                <a:solidFill>
+                  <a:srgbClr val="1F2937"/>
+                </a:solidFill>
+              </a:rPr>
+              <a:t> (RAG real </a:t>
+            </a:r>
+            <a:r>
+              <a:rPr sz="1150" dirty="0" err="1">
+                <a:solidFill>
+                  <a:srgbClr val="1F2937"/>
+                </a:solidFill>
+              </a:rPr>
+              <a:t>sobre</a:t>
+            </a:r>
+            <a:r>
+              <a:rPr sz="1150" dirty="0">
+                <a:solidFill>
+                  <a:srgbClr val="1F2937"/>
+                </a:solidFill>
+              </a:rPr>
+              <a:t> </a:t>
+            </a:r>
+            <a:r>
+              <a:rPr sz="1150" dirty="0" err="1">
+                <a:solidFill>
+                  <a:srgbClr val="1F2937"/>
+                </a:solidFill>
+              </a:rPr>
+              <a:t>ChromaDB</a:t>
+            </a:r>
+            <a:r>
+              <a:rPr sz="1150" dirty="0">
+                <a:solidFill>
+                  <a:srgbClr val="1F2937"/>
+                </a:solidFill>
+              </a:rPr>
+              <a:t>).</a:t>
             </a:r>
           </a:p>
         </p:txBody>
@@ -8451,7 +9500,7 @@
         <p:spPr>
           <a:xfrm>
             <a:off x="502920" y="6355080"/>
-            <a:ext cx="7315200" cy="274320"/>
+            <a:ext cx="7315200" cy="171842"/>
           </a:xfrm>
           <a:prstGeom prst="rect">
             <a:avLst/>
@@ -8459,7 +9508,7 @@
           <a:noFill/>
         </p:spPr>
         <p:txBody>
-          <a:bodyPr wrap="square" anchor="t" lIns="25400" rIns="25400" tIns="12700" bIns="12700">
+          <a:bodyPr wrap="square" lIns="25400" tIns="12700" rIns="25400" bIns="12700" anchor="t">
             <a:spAutoFit/>
           </a:bodyPr>
           <a:lstStyle/>
@@ -8473,13 +9522,94 @@
               </a:spcAft>
             </a:pPr>
             <a:r>
-              <a:rPr sz="950" b="0">
+              <a:rPr sz="950" b="0" dirty="0" err="1">
                 <a:solidFill>
                   <a:srgbClr val="6B7280"/>
                 </a:solidFill>
                 <a:latin typeface="Calibri"/>
               </a:rPr>
-              <a:t>Reconstruida del export de trazas · modelo local Gemma (Ollama)</a:t>
+              <a:t>Reconstruida</a:t>
+            </a:r>
+            <a:r>
+              <a:rPr sz="950" b="0" dirty="0">
+                <a:solidFill>
+                  <a:srgbClr val="6B7280"/>
+                </a:solidFill>
+                <a:latin typeface="Calibri"/>
+              </a:rPr>
+              <a:t> del export de </a:t>
+            </a:r>
+            <a:r>
+              <a:rPr sz="950" b="0" dirty="0" err="1">
+                <a:solidFill>
+                  <a:srgbClr val="6B7280"/>
+                </a:solidFill>
+                <a:latin typeface="Calibri"/>
+              </a:rPr>
+              <a:t>trazas</a:t>
+            </a:r>
+            <a:r>
+              <a:rPr sz="950" b="0" dirty="0">
+                <a:solidFill>
+                  <a:srgbClr val="6B7280"/>
+                </a:solidFill>
+                <a:latin typeface="Calibri"/>
+              </a:rPr>
+              <a:t> · </a:t>
+            </a:r>
+            <a:r>
+              <a:rPr sz="950" b="0" dirty="0" err="1">
+                <a:solidFill>
+                  <a:srgbClr val="6B7280"/>
+                </a:solidFill>
+                <a:latin typeface="Calibri"/>
+              </a:rPr>
+              <a:t>modelo</a:t>
+            </a:r>
+            <a:r>
+              <a:rPr sz="950" b="0" dirty="0">
+                <a:solidFill>
+                  <a:srgbClr val="6B7280"/>
+                </a:solidFill>
+                <a:latin typeface="Calibri"/>
+              </a:rPr>
+              <a:t> local </a:t>
+            </a:r>
+            <a:r>
+              <a:rPr lang="en-US" sz="950" dirty="0">
+                <a:solidFill>
+                  <a:srgbClr val="6B7280"/>
+                </a:solidFill>
+                <a:latin typeface="Calibri"/>
+              </a:rPr>
+              <a:t>gemma4:e4b-it-q8_0 </a:t>
+            </a:r>
+            <a:r>
+              <a:rPr sz="950" b="0" dirty="0">
+                <a:solidFill>
+                  <a:srgbClr val="6B7280"/>
+                </a:solidFill>
+                <a:latin typeface="Calibri"/>
+              </a:rPr>
+              <a:t>(</a:t>
+            </a:r>
+            <a:r>
+              <a:rPr sz="950" b="0" dirty="0" err="1">
+                <a:solidFill>
+                  <a:srgbClr val="6B7280"/>
+                </a:solidFill>
+                <a:latin typeface="Calibri"/>
+              </a:rPr>
+              <a:t>Ollama</a:t>
+            </a:r>
+            <a:r>
+              <a:rPr sz="950" b="0" dirty="0">
+                <a:solidFill>
+                  <a:srgbClr val="6B7280"/>
+                </a:solidFill>
+                <a:latin typeface="Calibri"/>
+              </a:rPr>
+              <a:t>)</a:t>
             </a:r>
           </a:p>
         </p:txBody>
@@ -8493,7 +9623,7 @@
 </file>
 
 <file path=ppt/slides/slide8.xml><?xml version="1.0" encoding="utf-8"?>
-<p:sld xmlns:a="http://schemas.openxmlformats.org/drawingml/2006/main" xmlns:p="http://schemas.openxmlformats.org/presentationml/2006/main" xmlns:r="http://schemas.openxmlformats.org/officeDocument/2006/relationships">
+<p:sld xmlns:a="http://schemas.openxmlformats.org/drawingml/2006/main" xmlns:r="http://schemas.openxmlformats.org/officeDocument/2006/relationships" xmlns:p="http://schemas.openxmlformats.org/presentationml/2006/main">
   <p:cSld>
     <p:spTree>
       <p:nvGrpSpPr>
@@ -8501,7 +9631,14 @@
         <p:cNvGrpSpPr/>
         <p:nvPr/>
       </p:nvGrpSpPr>
-      <p:grpSpPr/>
+      <p:grpSpPr>
+        <a:xfrm>
+          <a:off x="0" y="0"/>
+          <a:ext cx="0" cy="0"/>
+          <a:chOff x="0" y="0"/>
+          <a:chExt cx="0" cy="0"/>
+        </a:xfrm>
+      </p:grpSpPr>
       <p:sp>
         <p:nvSpPr>
           <p:cNvPr id="2" name="Rectangle 1"/>
@@ -8543,6 +9680,7 @@
           <a:lstStyle/>
           <a:p>
             <a:pPr algn="ctr"/>
+            <a:endParaRPr/>
           </a:p>
         </p:txBody>
       </p:sp>
@@ -8587,6 +9725,7 @@
           <a:lstStyle/>
           <a:p>
             <a:pPr algn="ctr"/>
+            <a:endParaRPr/>
           </a:p>
         </p:txBody>
       </p:sp>
@@ -8607,7 +9746,7 @@
           <a:noFill/>
         </p:spPr>
         <p:txBody>
-          <a:bodyPr wrap="square" anchor="t" lIns="25400" rIns="25400" tIns="12700" bIns="12700">
+          <a:bodyPr wrap="square" lIns="25400" tIns="12700" rIns="25400" bIns="12700" anchor="t">
             <a:spAutoFit/>
           </a:bodyPr>
           <a:lstStyle/>
@@ -8649,7 +9788,7 @@
           <a:noFill/>
         </p:spPr>
         <p:txBody>
-          <a:bodyPr wrap="square" anchor="t" lIns="25400" rIns="25400" tIns="12700" bIns="12700">
+          <a:bodyPr wrap="square" lIns="25400" tIns="12700" rIns="25400" bIns="12700" anchor="t">
             <a:spAutoFit/>
           </a:bodyPr>
           <a:lstStyle/>
@@ -8691,7 +9830,7 @@
           <a:noFill/>
         </p:spPr>
         <p:txBody>
-          <a:bodyPr wrap="square" anchor="t" lIns="25400" rIns="25400" tIns="12700" bIns="12700">
+          <a:bodyPr wrap="square" lIns="25400" tIns="12700" rIns="25400" bIns="12700" anchor="t">
             <a:spAutoFit/>
           </a:bodyPr>
           <a:lstStyle/>
@@ -8725,7 +9864,7 @@
         <p:spPr>
           <a:xfrm>
             <a:off x="502920" y="6483096"/>
-            <a:ext cx="8229600" cy="274320"/>
+            <a:ext cx="8229600" cy="164148"/>
           </a:xfrm>
           <a:prstGeom prst="rect">
             <a:avLst/>
@@ -8733,7 +9872,7 @@
           <a:noFill/>
         </p:spPr>
         <p:txBody>
-          <a:bodyPr wrap="square" anchor="t" lIns="25400" rIns="25400" tIns="12700" bIns="12700">
+          <a:bodyPr wrap="square" lIns="25400" tIns="12700" rIns="25400" bIns="12700" anchor="t">
             <a:spAutoFit/>
           </a:bodyPr>
           <a:lstStyle/>
@@ -8747,13 +9886,31 @@
               </a:spcAft>
             </a:pPr>
             <a:r>
-              <a:rPr sz="900" b="0">
+              <a:rPr sz="900" b="0" dirty="0">
                 <a:solidFill>
                   <a:srgbClr val="6B7280"/>
                 </a:solidFill>
                 <a:latin typeface="Calibri"/>
               </a:rPr>
-              <a:t>Tutor Académico Personal · IA 2026 · UTN Santa Fe — CIDISI</a:t>
+              <a:t>Tutor </a:t>
+            </a:r>
+            <a:r>
+              <a:rPr sz="900" b="0" dirty="0" err="1">
+                <a:solidFill>
+                  <a:srgbClr val="6B7280"/>
+                </a:solidFill>
+                <a:latin typeface="Calibri"/>
+              </a:rPr>
+              <a:t>Académico</a:t>
+            </a:r>
+            <a:r>
+              <a:rPr sz="900" b="0" dirty="0">
+                <a:solidFill>
+                  <a:srgbClr val="6B7280"/>
+                </a:solidFill>
+                <a:latin typeface="Calibri"/>
+              </a:rPr>
+              <a:t> Personal · IA 2026 · UTN Santa Fe </a:t>
             </a:r>
           </a:p>
         </p:txBody>
@@ -8801,6 +9958,7 @@
           <a:lstStyle/>
           <a:p>
             <a:pPr algn="ctr"/>
+            <a:endParaRPr/>
           </a:p>
         </p:txBody>
       </p:sp>
@@ -8845,6 +10003,7 @@
           <a:lstStyle/>
           <a:p>
             <a:pPr algn="ctr"/>
+            <a:endParaRPr/>
           </a:p>
         </p:txBody>
       </p:sp>
@@ -8865,7 +10024,7 @@
           <a:noFill/>
         </p:spPr>
         <p:txBody>
-          <a:bodyPr wrap="square" anchor="ctr" lIns="25400" rIns="25400" tIns="12700" bIns="12700">
+          <a:bodyPr wrap="square" lIns="25400" tIns="12700" rIns="25400" bIns="12700" anchor="ctr">
             <a:spAutoFit/>
           </a:bodyPr>
           <a:lstStyle/>
@@ -8899,7 +10058,7 @@
         <p:spPr>
           <a:xfrm>
             <a:off x="822960" y="2240280"/>
-            <a:ext cx="4937760" cy="3108960"/>
+            <a:ext cx="4937760" cy="1072088"/>
           </a:xfrm>
           <a:prstGeom prst="rect">
             <a:avLst/>
@@ -8918,7 +10077,7 @@
               </a:spcAft>
             </a:pPr>
             <a:r>
-              <a:rPr b="1" sz="1400">
+              <a:rPr sz="1400" b="1" dirty="0">
                 <a:solidFill>
                   <a:srgbClr val="10B981"/>
                 </a:solidFill>
@@ -8926,13 +10085,106 @@
               <a:t>✓  </a:t>
             </a:r>
             <a:r>
-              <a:rPr sz="1350">
-                <a:solidFill>
-                  <a:srgbClr val="1F2937"/>
-                </a:solidFill>
-              </a:rPr>
-              <a:t>6 agentes en LangGraph, cada uno con su grafo</a:t>
-            </a:r>
+              <a:rPr sz="1350" dirty="0">
+                <a:solidFill>
+                  <a:srgbClr val="1F2937"/>
+                </a:solidFill>
+              </a:rPr>
+              <a:t>6 </a:t>
+            </a:r>
+            <a:r>
+              <a:rPr sz="1350" dirty="0" err="1">
+                <a:solidFill>
+                  <a:srgbClr val="1F2937"/>
+                </a:solidFill>
+              </a:rPr>
+              <a:t>agentes</a:t>
+            </a:r>
+            <a:r>
+              <a:rPr sz="1350" dirty="0">
+                <a:solidFill>
+                  <a:srgbClr val="1F2937"/>
+                </a:solidFill>
+              </a:rPr>
+              <a:t> </a:t>
+            </a:r>
+            <a:r>
+              <a:rPr sz="1350" dirty="0" err="1">
+                <a:solidFill>
+                  <a:srgbClr val="1F2937"/>
+                </a:solidFill>
+              </a:rPr>
+              <a:t>en</a:t>
+            </a:r>
+            <a:r>
+              <a:rPr sz="1350" dirty="0">
+                <a:solidFill>
+                  <a:srgbClr val="1F2937"/>
+                </a:solidFill>
+              </a:rPr>
+              <a:t> </a:t>
+            </a:r>
+            <a:r>
+              <a:rPr sz="1350" dirty="0" err="1">
+                <a:solidFill>
+                  <a:srgbClr val="1F2937"/>
+                </a:solidFill>
+              </a:rPr>
+              <a:t>LangGraph</a:t>
+            </a:r>
+            <a:r>
+              <a:rPr sz="1350" dirty="0">
+                <a:solidFill>
+                  <a:srgbClr val="1F2937"/>
+                </a:solidFill>
+              </a:rPr>
+              <a:t>, </a:t>
+            </a:r>
+            <a:r>
+              <a:rPr sz="1350" dirty="0" err="1">
+                <a:solidFill>
+                  <a:srgbClr val="1F2937"/>
+                </a:solidFill>
+              </a:rPr>
+              <a:t>cada</a:t>
+            </a:r>
+            <a:r>
+              <a:rPr sz="1350" dirty="0">
+                <a:solidFill>
+                  <a:srgbClr val="1F2937"/>
+                </a:solidFill>
+              </a:rPr>
+              <a:t> uno con </a:t>
+            </a:r>
+            <a:r>
+              <a:rPr sz="1350" dirty="0" err="1">
+                <a:solidFill>
+                  <a:srgbClr val="1F2937"/>
+                </a:solidFill>
+              </a:rPr>
+              <a:t>su</a:t>
+            </a:r>
+            <a:r>
+              <a:rPr sz="1350" dirty="0">
+                <a:solidFill>
+                  <a:srgbClr val="1F2937"/>
+                </a:solidFill>
+              </a:rPr>
+              <a:t> </a:t>
+            </a:r>
+            <a:r>
+              <a:rPr sz="1350" dirty="0" err="1">
+                <a:solidFill>
+                  <a:srgbClr val="1F2937"/>
+                </a:solidFill>
+              </a:rPr>
+              <a:t>grafo</a:t>
+            </a:r>
+            <a:endParaRPr sz="1350" dirty="0">
+              <a:solidFill>
+                <a:srgbClr val="1F2937"/>
+              </a:solidFill>
+            </a:endParaRPr>
           </a:p>
           <a:p>
             <a:pPr>
@@ -8941,7 +10193,7 @@
               </a:spcAft>
             </a:pPr>
             <a:r>
-              <a:rPr b="1" sz="1400">
+              <a:rPr sz="1400" b="1" dirty="0">
                 <a:solidFill>
                   <a:srgbClr val="10B981"/>
                 </a:solidFill>
@@ -8949,13 +10201,50 @@
               <a:t>✓  </a:t>
             </a:r>
             <a:r>
-              <a:rPr sz="1350">
-                <a:solidFill>
-                  <a:srgbClr val="1F2937"/>
-                </a:solidFill>
-              </a:rPr>
-              <a:t>Orquestación hub-and-spoke + RAG sobre ChromaDB</a:t>
-            </a:r>
+              <a:rPr sz="1350" dirty="0" err="1">
+                <a:solidFill>
+                  <a:srgbClr val="1F2937"/>
+                </a:solidFill>
+              </a:rPr>
+              <a:t>Orquestación</a:t>
+            </a:r>
+            <a:r>
+              <a:rPr sz="1350" dirty="0">
+                <a:solidFill>
+                  <a:srgbClr val="1F2937"/>
+                </a:solidFill>
+              </a:rPr>
+              <a:t> + RAG </a:t>
+            </a:r>
+            <a:r>
+              <a:rPr sz="1350" dirty="0" err="1">
+                <a:solidFill>
+                  <a:srgbClr val="1F2937"/>
+                </a:solidFill>
+              </a:rPr>
+              <a:t>sobre</a:t>
+            </a:r>
+            <a:r>
+              <a:rPr sz="1350" dirty="0">
+                <a:solidFill>
+                  <a:srgbClr val="1F2937"/>
+                </a:solidFill>
+              </a:rPr>
+              <a:t> </a:t>
+            </a:r>
+            <a:r>
+              <a:rPr sz="1350" dirty="0" err="1">
+                <a:solidFill>
+                  <a:srgbClr val="1F2937"/>
+                </a:solidFill>
+              </a:rPr>
+              <a:t>ChromaDB</a:t>
+            </a:r>
+            <a:endParaRPr sz="1350" dirty="0">
+              <a:solidFill>
+                <a:srgbClr val="1F2937"/>
+              </a:solidFill>
+            </a:endParaRPr>
           </a:p>
           <a:p>
             <a:pPr>
@@ -8964,7 +10253,7 @@
               </a:spcAft>
             </a:pPr>
             <a:r>
-              <a:rPr b="1" sz="1400">
+              <a:rPr sz="1400" b="1" dirty="0">
                 <a:solidFill>
                   <a:srgbClr val="10B981"/>
                 </a:solidFill>
@@ -8972,36 +10261,42 @@
               <a:t>✓  </a:t>
             </a:r>
             <a:r>
-              <a:rPr sz="1350">
-                <a:solidFill>
-                  <a:srgbClr val="1F2937"/>
-                </a:solidFill>
-              </a:rPr>
-              <a:t>Memoria SQLite + API FastAPI + UI Next.js</a:t>
-            </a:r>
-          </a:p>
-          <a:p>
-            <a:pPr>
-              <a:spcAft>
-                <a:spcPts val="1300"/>
-              </a:spcAft>
-            </a:pPr>
-            <a:r>
-              <a:rPr b="1" sz="1400">
-                <a:solidFill>
-                  <a:srgbClr val="10B981"/>
-                </a:solidFill>
-              </a:rPr>
-              <a:t>✓  </a:t>
-            </a:r>
-            <a:r>
-              <a:rPr sz="1350">
-                <a:solidFill>
-                  <a:srgbClr val="1F2937"/>
-                </a:solidFill>
-              </a:rPr>
-              <a:t>Refactor de arquitectura (épica 10)</a:t>
-            </a:r>
+              <a:rPr sz="1350" dirty="0">
+                <a:solidFill>
+                  <a:srgbClr val="1F2937"/>
+                </a:solidFill>
+              </a:rPr>
+              <a:t>Memoria SQLite + API </a:t>
+            </a:r>
+            <a:r>
+              <a:rPr sz="1350" dirty="0" err="1">
+                <a:solidFill>
+                  <a:srgbClr val="1F2937"/>
+                </a:solidFill>
+              </a:rPr>
+              <a:t>FastAP</a:t>
+            </a:r>
+            <a:r>
+              <a:rPr lang="en-US" sz="1350" dirty="0" err="1">
+                <a:solidFill>
+                  <a:srgbClr val="1F2937"/>
+                </a:solidFill>
+              </a:rPr>
+              <a:t>I</a:t>
+            </a:r>
+            <a:r>
+              <a:rPr lang="en-US" sz="1350" dirty="0">
+                <a:solidFill>
+                  <a:srgbClr val="1F2937"/>
+                </a:solidFill>
+              </a:rPr>
+              <a:t>.</a:t>
+            </a:r>
+            <a:endParaRPr sz="1350" dirty="0">
+              <a:solidFill>
+                <a:srgbClr val="1F2937"/>
+              </a:solidFill>
+            </a:endParaRPr>
           </a:p>
         </p:txBody>
       </p:sp>
@@ -9048,6 +10343,7 @@
           <a:lstStyle/>
           <a:p>
             <a:pPr algn="ctr"/>
+            <a:endParaRPr/>
           </a:p>
         </p:txBody>
       </p:sp>
@@ -9092,6 +10388,7 @@
           <a:lstStyle/>
           <a:p>
             <a:pPr algn="ctr"/>
+            <a:endParaRPr/>
           </a:p>
         </p:txBody>
       </p:sp>
@@ -9112,7 +10409,7 @@
           <a:noFill/>
         </p:spPr>
         <p:txBody>
-          <a:bodyPr wrap="square" anchor="ctr" lIns="25400" rIns="25400" tIns="12700" bIns="12700">
+          <a:bodyPr wrap="square" lIns="25400" tIns="12700" rIns="25400" bIns="12700" anchor="ctr">
             <a:spAutoFit/>
           </a:bodyPr>
           <a:lstStyle/>
@@ -9146,7 +10443,7 @@
         <p:spPr>
           <a:xfrm>
             <a:off x="6492240" y="2240280"/>
-            <a:ext cx="4937760" cy="3108960"/>
+            <a:ext cx="4937760" cy="1310615"/>
           </a:xfrm>
           <a:prstGeom prst="rect">
             <a:avLst/>
@@ -9165,7 +10462,7 @@
               </a:spcAft>
             </a:pPr>
             <a:r>
-              <a:rPr b="1" sz="1400">
+              <a:rPr lang="es-ES" sz="1600" b="1" dirty="0">
                 <a:solidFill>
                   <a:srgbClr val="F59E0B"/>
                 </a:solidFill>
@@ -9173,13 +10470,18 @@
               <a:t>○  </a:t>
             </a:r>
             <a:r>
-              <a:rPr sz="1350">
-                <a:solidFill>
-                  <a:srgbClr val="1F2937"/>
-                </a:solidFill>
-              </a:rPr>
-              <a:t>Épica 08 · Observabilidad: integrar Langfuse a dev (hoy en su rama)</a:t>
-            </a:r>
+              <a:rPr lang="es-ES" sz="1400" dirty="0">
+                <a:solidFill>
+                  <a:srgbClr val="1F2937"/>
+                </a:solidFill>
+              </a:rPr>
+              <a:t>Épica 07 · Interfaz de usuario</a:t>
+            </a:r>
+            <a:endParaRPr lang="en-US" sz="1400" b="1" dirty="0">
+              <a:solidFill>
+                <a:srgbClr val="F59E0B"/>
+              </a:solidFill>
+            </a:endParaRPr>
           </a:p>
           <a:p>
             <a:pPr>
@@ -9188,7 +10490,7 @@
               </a:spcAft>
             </a:pPr>
             <a:r>
-              <a:rPr b="1" sz="1400">
+              <a:rPr sz="1400" b="1" dirty="0">
                 <a:solidFill>
                   <a:srgbClr val="F59E0B"/>
                 </a:solidFill>
@@ -9196,12 +10498,116 @@
               <a:t>○  </a:t>
             </a:r>
             <a:r>
-              <a:rPr sz="1350">
-                <a:solidFill>
-                  <a:srgbClr val="1F2937"/>
-                </a:solidFill>
-              </a:rPr>
-              <a:t>Épica 09 · Profile bootstrap: cerrar el gap de carga de perfil</a:t>
+              <a:rPr sz="1350" dirty="0" err="1">
+                <a:solidFill>
+                  <a:srgbClr val="1F2937"/>
+                </a:solidFill>
+              </a:rPr>
+              <a:t>Épica</a:t>
+            </a:r>
+            <a:r>
+              <a:rPr sz="1350" dirty="0">
+                <a:solidFill>
+                  <a:srgbClr val="1F2937"/>
+                </a:solidFill>
+              </a:rPr>
+              <a:t> 08 · </a:t>
+            </a:r>
+            <a:r>
+              <a:rPr sz="1350" dirty="0" err="1">
+                <a:solidFill>
+                  <a:srgbClr val="1F2937"/>
+                </a:solidFill>
+              </a:rPr>
+              <a:t>Observabilidad</a:t>
+            </a:r>
+            <a:r>
+              <a:rPr sz="1350" dirty="0">
+                <a:solidFill>
+                  <a:srgbClr val="1F2937"/>
+                </a:solidFill>
+              </a:rPr>
+              <a:t>: </a:t>
+            </a:r>
+            <a:r>
+              <a:rPr sz="1350" dirty="0" err="1">
+                <a:solidFill>
+                  <a:srgbClr val="1F2937"/>
+                </a:solidFill>
+              </a:rPr>
+              <a:t>integrar</a:t>
+            </a:r>
+            <a:r>
+              <a:rPr sz="1350" dirty="0">
+                <a:solidFill>
+                  <a:srgbClr val="1F2937"/>
+                </a:solidFill>
+              </a:rPr>
+              <a:t> </a:t>
+            </a:r>
+            <a:r>
+              <a:rPr sz="1350" dirty="0" err="1">
+                <a:solidFill>
+                  <a:srgbClr val="1F2937"/>
+                </a:solidFill>
+              </a:rPr>
+              <a:t>Langfuse</a:t>
+            </a:r>
+            <a:r>
+              <a:rPr sz="1350" dirty="0">
+                <a:solidFill>
+                  <a:srgbClr val="1F2937"/>
+                </a:solidFill>
+              </a:rPr>
+              <a:t> a dev (hoy </a:t>
+            </a:r>
+            <a:r>
+              <a:rPr sz="1350" dirty="0" err="1">
+                <a:solidFill>
+                  <a:srgbClr val="1F2937"/>
+                </a:solidFill>
+              </a:rPr>
+              <a:t>en</a:t>
+            </a:r>
+            <a:r>
+              <a:rPr sz="1350" dirty="0">
+                <a:solidFill>
+                  <a:srgbClr val="1F2937"/>
+                </a:solidFill>
+              </a:rPr>
+              <a:t> </a:t>
+            </a:r>
+            <a:r>
+              <a:rPr sz="1350" dirty="0" err="1">
+                <a:solidFill>
+                  <a:srgbClr val="1F2937"/>
+                </a:solidFill>
+              </a:rPr>
+              <a:t>su</a:t>
+            </a:r>
+            <a:r>
+              <a:rPr sz="1350" dirty="0">
+                <a:solidFill>
+                  <a:srgbClr val="1F2937"/>
+                </a:solidFill>
+              </a:rPr>
+              <a:t> </a:t>
+            </a:r>
+            <a:r>
+              <a:rPr sz="1350" dirty="0" err="1">
+                <a:solidFill>
+                  <a:srgbClr val="1F2937"/>
+                </a:solidFill>
+              </a:rPr>
+              <a:t>rama</a:t>
+            </a:r>
+            <a:r>
+              <a:rPr sz="1350" dirty="0">
+                <a:solidFill>
+                  <a:srgbClr val="1F2937"/>
+                </a:solidFill>
+              </a:rPr>
+              <a:t>)</a:t>
             </a:r>
           </a:p>
           <a:p>
@@ -9211,7 +10617,7 @@
               </a:spcAft>
             </a:pPr>
             <a:r>
-              <a:rPr b="1" sz="1400">
+              <a:rPr sz="1400" b="1" dirty="0">
                 <a:solidFill>
                   <a:srgbClr val="F59E0B"/>
                 </a:solidFill>
@@ -9219,36 +10625,82 @@
               <a:t>○  </a:t>
             </a:r>
             <a:r>
-              <a:rPr sz="1350">
-                <a:solidFill>
-                  <a:srgbClr val="1F2937"/>
-                </a:solidFill>
-              </a:rPr>
-              <a:t>OCR de matemática (fórmulas → LaTeX)</a:t>
-            </a:r>
-          </a:p>
-          <a:p>
-            <a:pPr>
-              <a:spcAft>
-                <a:spcPts val="1300"/>
-              </a:spcAft>
-            </a:pPr>
-            <a:r>
-              <a:rPr b="1" sz="1400">
-                <a:solidFill>
-                  <a:srgbClr val="F59E0B"/>
-                </a:solidFill>
-              </a:rPr>
-              <a:t>○  </a:t>
-            </a:r>
-            <a:r>
-              <a:rPr sz="1350">
-                <a:solidFill>
-                  <a:srgbClr val="1F2937"/>
-                </a:solidFill>
-              </a:rPr>
-              <a:t>Coloquio y demo en vivo · entrega final 29/06</a:t>
-            </a:r>
+              <a:rPr sz="1350" dirty="0" err="1">
+                <a:solidFill>
+                  <a:srgbClr val="1F2937"/>
+                </a:solidFill>
+              </a:rPr>
+              <a:t>Épica</a:t>
+            </a:r>
+            <a:r>
+              <a:rPr sz="1350" dirty="0">
+                <a:solidFill>
+                  <a:srgbClr val="1F2937"/>
+                </a:solidFill>
+              </a:rPr>
+              <a:t> 09 · Profile bootstrap: </a:t>
+            </a:r>
+            <a:r>
+              <a:rPr sz="1350" dirty="0" err="1">
+                <a:solidFill>
+                  <a:srgbClr val="1F2937"/>
+                </a:solidFill>
+              </a:rPr>
+              <a:t>cerrar</a:t>
+            </a:r>
+            <a:r>
+              <a:rPr sz="1350" dirty="0">
+                <a:solidFill>
+                  <a:srgbClr val="1F2937"/>
+                </a:solidFill>
+              </a:rPr>
+              <a:t> </a:t>
+            </a:r>
+            <a:r>
+              <a:rPr sz="1350" dirty="0" err="1">
+                <a:solidFill>
+                  <a:srgbClr val="1F2937"/>
+                </a:solidFill>
+              </a:rPr>
+              <a:t>el</a:t>
+            </a:r>
+            <a:r>
+              <a:rPr sz="1350" dirty="0">
+                <a:solidFill>
+                  <a:srgbClr val="1F2937"/>
+                </a:solidFill>
+              </a:rPr>
+              <a:t> gap de carga de </a:t>
+            </a:r>
+            <a:r>
+              <a:rPr sz="1350" dirty="0" err="1">
+                <a:solidFill>
+                  <a:srgbClr val="1F2937"/>
+                </a:solidFill>
+              </a:rPr>
+              <a:t>perfi</a:t>
+            </a:r>
+            <a:r>
+              <a:rPr lang="en-US" sz="1350" dirty="0" err="1">
+                <a:solidFill>
+                  <a:srgbClr val="1F2937"/>
+                </a:solidFill>
+              </a:rPr>
+              <a:t>l</a:t>
+            </a:r>
+            <a:r>
+              <a:rPr lang="en-US" sz="1350" dirty="0">
+                <a:solidFill>
+                  <a:srgbClr val="1F2937"/>
+                </a:solidFill>
+              </a:rPr>
+              <a:t>.</a:t>
+            </a:r>
+            <a:endParaRPr sz="1350" dirty="0">
+              <a:solidFill>
+                <a:srgbClr val="1F2937"/>
+              </a:solidFill>
+            </a:endParaRPr>
           </a:p>
         </p:txBody>
       </p:sp>
@@ -9261,7 +10713,7 @@
         <p:spPr>
           <a:xfrm>
             <a:off x="502920" y="5715000"/>
-            <a:ext cx="11155680" cy="640080"/>
+            <a:ext cx="11155680" cy="210314"/>
           </a:xfrm>
           <a:prstGeom prst="rect">
             <a:avLst/>
@@ -9269,7 +10721,7 @@
           <a:noFill/>
         </p:spPr>
         <p:txBody>
-          <a:bodyPr wrap="square" anchor="t" lIns="25400" rIns="25400" tIns="12700" bIns="12700">
+          <a:bodyPr wrap="square" lIns="25400" tIns="12700" rIns="25400" bIns="12700" anchor="t">
             <a:spAutoFit/>
           </a:bodyPr>
           <a:lstStyle/>
@@ -9283,14 +10735,137 @@
               </a:spcAft>
             </a:pPr>
             <a:r>
-              <a:rPr sz="1200" b="0">
+              <a:rPr sz="1200" b="0" dirty="0">
                 <a:solidFill>
                   <a:srgbClr val="6B7280"/>
                 </a:solidFill>
                 <a:latin typeface="Calibri"/>
               </a:rPr>
-              <a:t>Las trazas que mostramos se generaron ejecutando la rama de observabilidad; el próximo paso es integrarla a dev.</a:t>
-            </a:r>
+              <a:t>Las </a:t>
+            </a:r>
+            <a:r>
+              <a:rPr sz="1200" b="0" dirty="0" err="1">
+                <a:solidFill>
+                  <a:srgbClr val="6B7280"/>
+                </a:solidFill>
+                <a:latin typeface="Calibri"/>
+              </a:rPr>
+              <a:t>trazas</a:t>
+            </a:r>
+            <a:r>
+              <a:rPr sz="1200" b="0" dirty="0">
+                <a:solidFill>
+                  <a:srgbClr val="6B7280"/>
+                </a:solidFill>
+                <a:latin typeface="Calibri"/>
+              </a:rPr>
+              <a:t> </a:t>
+            </a:r>
+            <a:r>
+              <a:rPr sz="1200" b="0" dirty="0" err="1">
+                <a:solidFill>
+                  <a:srgbClr val="6B7280"/>
+                </a:solidFill>
+                <a:latin typeface="Calibri"/>
+              </a:rPr>
+              <a:t>que</a:t>
+            </a:r>
+            <a:r>
+              <a:rPr sz="1200" b="0" dirty="0">
+                <a:solidFill>
+                  <a:srgbClr val="6B7280"/>
+                </a:solidFill>
+                <a:latin typeface="Calibri"/>
+              </a:rPr>
+              <a:t> </a:t>
+            </a:r>
+            <a:r>
+              <a:rPr sz="1200" b="0" dirty="0" err="1">
+                <a:solidFill>
+                  <a:srgbClr val="6B7280"/>
+                </a:solidFill>
+                <a:latin typeface="Calibri"/>
+              </a:rPr>
+              <a:t>mostramos</a:t>
+            </a:r>
+            <a:r>
+              <a:rPr sz="1200" b="0" dirty="0">
+                <a:solidFill>
+                  <a:srgbClr val="6B7280"/>
+                </a:solidFill>
+                <a:latin typeface="Calibri"/>
+              </a:rPr>
+              <a:t> se </a:t>
+            </a:r>
+            <a:r>
+              <a:rPr sz="1200" b="0" dirty="0" err="1">
+                <a:solidFill>
+                  <a:srgbClr val="6B7280"/>
+                </a:solidFill>
+                <a:latin typeface="Calibri"/>
+              </a:rPr>
+              <a:t>generaron</a:t>
+            </a:r>
+            <a:r>
+              <a:rPr sz="1200" b="0" dirty="0">
+                <a:solidFill>
+                  <a:srgbClr val="6B7280"/>
+                </a:solidFill>
+                <a:latin typeface="Calibri"/>
+              </a:rPr>
+              <a:t> </a:t>
+            </a:r>
+            <a:r>
+              <a:rPr sz="1200" b="0" dirty="0" err="1">
+                <a:solidFill>
+                  <a:srgbClr val="6B7280"/>
+                </a:solidFill>
+                <a:latin typeface="Calibri"/>
+              </a:rPr>
+              <a:t>ejecutando</a:t>
+            </a:r>
+            <a:r>
+              <a:rPr sz="1200" b="0" dirty="0">
+                <a:solidFill>
+                  <a:srgbClr val="6B7280"/>
+                </a:solidFill>
+                <a:latin typeface="Calibri"/>
+              </a:rPr>
+              <a:t> la </a:t>
+            </a:r>
+            <a:r>
+              <a:rPr sz="1200" b="0" dirty="0" err="1">
+                <a:solidFill>
+                  <a:srgbClr val="6B7280"/>
+                </a:solidFill>
+                <a:latin typeface="Calibri"/>
+              </a:rPr>
+              <a:t>rama</a:t>
+            </a:r>
+            <a:r>
+              <a:rPr sz="1200" b="0" dirty="0">
+                <a:solidFill>
+                  <a:srgbClr val="6B7280"/>
+                </a:solidFill>
+                <a:latin typeface="Calibri"/>
+              </a:rPr>
+              <a:t> de </a:t>
+            </a:r>
+            <a:r>
+              <a:rPr sz="1200" b="0" dirty="0" err="1">
+                <a:solidFill>
+                  <a:srgbClr val="6B7280"/>
+                </a:solidFill>
+                <a:latin typeface="Calibri"/>
+              </a:rPr>
+              <a:t>observabilidad</a:t>
+            </a:r>
+            <a:endParaRPr sz="1200" b="0" dirty="0">
+              <a:solidFill>
+                <a:srgbClr val="6B7280"/>
+              </a:solidFill>
+              <a:latin typeface="Calibri"/>
+            </a:endParaRPr>
           </a:p>
         </p:txBody>
       </p:sp>
@@ -9303,7 +10878,7 @@
 </file>
 
 <file path=ppt/slides/slide9.xml><?xml version="1.0" encoding="utf-8"?>
-<p:sld xmlns:a="http://schemas.openxmlformats.org/drawingml/2006/main" xmlns:p="http://schemas.openxmlformats.org/presentationml/2006/main" xmlns:r="http://schemas.openxmlformats.org/officeDocument/2006/relationships">
+<p:sld xmlns:a="http://schemas.openxmlformats.org/drawingml/2006/main" xmlns:r="http://schemas.openxmlformats.org/officeDocument/2006/relationships" xmlns:p="http://schemas.openxmlformats.org/presentationml/2006/main">
   <p:cSld>
     <p:spTree>
       <p:nvGrpSpPr>
@@ -9311,7 +10886,14 @@
         <p:cNvGrpSpPr/>
         <p:nvPr/>
       </p:nvGrpSpPr>
-      <p:grpSpPr/>
+      <p:grpSpPr>
+        <a:xfrm>
+          <a:off x="0" y="0"/>
+          <a:ext cx="0" cy="0"/>
+          <a:chOff x="0" y="0"/>
+          <a:chExt cx="0" cy="0"/>
+        </a:xfrm>
+      </p:grpSpPr>
       <p:sp>
         <p:nvSpPr>
           <p:cNvPr id="2" name="Rectangle 1"/>
@@ -9353,6 +10935,7 @@
           <a:lstStyle/>
           <a:p>
             <a:pPr algn="ctr"/>
+            <a:endParaRPr/>
           </a:p>
         </p:txBody>
       </p:sp>
@@ -9397,6 +10980,7 @@
           <a:lstStyle/>
           <a:p>
             <a:pPr algn="ctr"/>
+            <a:endParaRPr/>
           </a:p>
         </p:txBody>
       </p:sp>
@@ -9417,7 +11001,7 @@
           <a:noFill/>
         </p:spPr>
         <p:txBody>
-          <a:bodyPr wrap="square" anchor="t" lIns="25400" rIns="25400" tIns="12700" bIns="12700">
+          <a:bodyPr wrap="square" lIns="25400" tIns="12700" rIns="25400" bIns="12700" anchor="t">
             <a:spAutoFit/>
           </a:bodyPr>
           <a:lstStyle/>
@@ -9459,7 +11043,7 @@
           <a:noFill/>
         </p:spPr>
         <p:txBody>
-          <a:bodyPr wrap="square" anchor="t" lIns="25400" rIns="25400" tIns="12700" bIns="12700">
+          <a:bodyPr wrap="square" lIns="25400" tIns="12700" rIns="25400" bIns="12700" anchor="t">
             <a:spAutoFit/>
           </a:bodyPr>
           <a:lstStyle/>
@@ -9486,14 +11070,14 @@
       </p:sp>
       <p:sp>
         <p:nvSpPr>
-          <p:cNvPr id="6" name="TextBox 5"/>
+          <p:cNvPr id="7" name="TextBox 6"/>
           <p:cNvSpPr txBox="1"/>
           <p:nvPr/>
         </p:nvSpPr>
         <p:spPr>
           <a:xfrm>
-            <a:off x="822960" y="5029200"/>
-            <a:ext cx="10515600" cy="548640"/>
+            <a:off x="822960" y="5989320"/>
+            <a:ext cx="10515600" cy="225703"/>
           </a:xfrm>
           <a:prstGeom prst="rect">
             <a:avLst/>
@@ -9501,7 +11085,7 @@
           <a:noFill/>
         </p:spPr>
         <p:txBody>
-          <a:bodyPr wrap="square" anchor="t" lIns="25400" rIns="25400" tIns="12700" bIns="12700">
+          <a:bodyPr wrap="square" lIns="25400" tIns="12700" rIns="25400" bIns="12700" anchor="t">
             <a:spAutoFit/>
           </a:bodyPr>
           <a:lstStyle/>
@@ -9515,55 +11099,31 @@
               </a:spcAft>
             </a:pPr>
             <a:r>
-              <a:rPr sz="2000" b="1">
-                <a:solidFill>
-                  <a:srgbClr val="8B5CF6"/>
-                </a:solidFill>
-                <a:latin typeface="Calibri"/>
-              </a:rPr>
-              <a:t>¿Pasamos a la demo en vivo?</a:t>
-            </a:r>
-          </a:p>
-        </p:txBody>
-      </p:sp>
-      <p:sp>
-        <p:nvSpPr>
-          <p:cNvPr id="7" name="TextBox 6"/>
-          <p:cNvSpPr txBox="1"/>
-          <p:nvPr/>
-        </p:nvSpPr>
-        <p:spPr>
-          <a:xfrm>
-            <a:off x="822960" y="5989320"/>
-            <a:ext cx="10515600" cy="457200"/>
-          </a:xfrm>
-          <a:prstGeom prst="rect">
-            <a:avLst/>
-          </a:prstGeom>
-          <a:noFill/>
-        </p:spPr>
-        <p:txBody>
-          <a:bodyPr wrap="square" anchor="t" lIns="25400" rIns="25400" tIns="12700" bIns="12700">
-            <a:spAutoFit/>
-          </a:bodyPr>
-          <a:lstStyle/>
-          <a:p>
-            <a:pPr algn="l">
-              <a:lnSpc>
-                <a:spcPct val="100000"/>
-              </a:lnSpc>
-              <a:spcAft>
-                <a:spcPts val="400"/>
-              </a:spcAft>
-            </a:pPr>
-            <a:r>
-              <a:rPr sz="1300" b="0">
+              <a:rPr sz="1300" b="0" dirty="0">
                 <a:solidFill>
                   <a:srgbClr val="9CA3AF"/>
                 </a:solidFill>
                 <a:latin typeface="Calibri"/>
               </a:rPr>
-              <a:t>Tutor Académico Personal · IA 2026 · UTN Santa Fe — CIDISI</a:t>
+              <a:t>Tutor </a:t>
+            </a:r>
+            <a:r>
+              <a:rPr sz="1300" b="0" dirty="0" err="1">
+                <a:solidFill>
+                  <a:srgbClr val="9CA3AF"/>
+                </a:solidFill>
+                <a:latin typeface="Calibri"/>
+              </a:rPr>
+              <a:t>Académico</a:t>
+            </a:r>
+            <a:r>
+              <a:rPr sz="1300" b="0" dirty="0">
+                <a:solidFill>
+                  <a:srgbClr val="9CA3AF"/>
+                </a:solidFill>
+                <a:latin typeface="Calibri"/>
+              </a:rPr>
+              <a:t> Personal · IA 2026 · UTN Santa Fe</a:t>
             </a:r>
           </a:p>
         </p:txBody>

--- a/docs/presentation/Avances_Tutor_Academico_TP2.pptx
+++ b/docs/presentation/Avances_Tutor_Academico_TP2.pptx
@@ -4077,14 +4077,14 @@
           <p:nvPr>
             <p:extLst>
               <p:ext uri="{D42A27DB-BD31-4B8C-83A1-F6EECF244321}">
-                <p14:modId xmlns:p14="http://schemas.microsoft.com/office/powerpoint/2010/main" val="82583015"/>
+                <p14:modId xmlns:p14="http://schemas.microsoft.com/office/powerpoint/2010/main" val="3460034960"/>
               </p:ext>
             </p:extLst>
           </p:nvPr>
         </p:nvGraphicFramePr>
         <p:xfrm>
           <a:off x="502920" y="1828800"/>
-          <a:ext cx="11155680" cy="4297680"/>
+          <a:ext cx="11155680" cy="4297682"/>
         </p:xfrm>
         <a:graphic>
           <a:graphicData uri="http://schemas.openxmlformats.org/drawingml/2006/table">
@@ -4130,8 +4130,10 @@
                         </a:defRPr>
                       </a:pPr>
                       <a:r>
+                        <a:rPr dirty="0" err="1"/>
                         <a:t>Épica</a:t>
                       </a:r>
+                      <a:endParaRPr dirty="0"/>
                     </a:p>
                   </a:txBody>
                   <a:tcPr anchor="ctr">
@@ -4154,8 +4156,10 @@
                         </a:defRPr>
                       </a:pPr>
                       <a:r>
+                        <a:rPr dirty="0" err="1"/>
                         <a:t>Componente</a:t>
                       </a:r>
+                      <a:endParaRPr dirty="0"/>
                     </a:p>
                   </a:txBody>
                   <a:tcPr anchor="ctr">
@@ -4178,6 +4182,7 @@
                         </a:defRPr>
                       </a:pPr>
                       <a:r>
+                        <a:rPr dirty="0"/>
                         <a:t>Estado</a:t>
                       </a:r>
                     </a:p>
@@ -4312,8 +4317,10 @@
                         </a:defRPr>
                       </a:pPr>
                       <a:r>
+                        <a:rPr dirty="0" err="1"/>
                         <a:t>Ingestor</a:t>
                       </a:r>
+                      <a:endParaRPr dirty="0"/>
                     </a:p>
                   </a:txBody>
                   <a:tcPr anchor="ctr">
@@ -4391,8 +4398,10 @@
                         </a:defRPr>
                       </a:pPr>
                       <a:r>
+                        <a:rPr dirty="0" err="1"/>
                         <a:t>ExamGenerator</a:t>
                       </a:r>
+                      <a:endParaRPr dirty="0"/>
                     </a:p>
                   </a:txBody>
                   <a:tcPr anchor="ctr">
@@ -4573,7 +4582,16 @@
                         </a:defRPr>
                       </a:pPr>
                       <a:r>
-                        <a:t>✅  en dev</a:t>
+                        <a:rPr dirty="0"/>
+                        <a:t>✅  </a:t>
+                      </a:r>
+                      <a:r>
+                        <a:rPr dirty="0" err="1"/>
+                        <a:t>en</a:t>
+                      </a:r>
+                      <a:r>
+                        <a:rPr dirty="0"/>
+                        <a:t> dev</a:t>
                       </a:r>
                     </a:p>
                   </a:txBody>
@@ -4604,6 +4622,7 @@
                         </a:defRPr>
                       </a:pPr>
                       <a:r>
+                        <a:rPr dirty="0"/>
                         <a:t>06</a:t>
                       </a:r>
                     </a:p>
@@ -4628,6 +4647,7 @@
                         </a:defRPr>
                       </a:pPr>
                       <a:r>
+                        <a:rPr dirty="0"/>
                         <a:t>Support Agent</a:t>
                       </a:r>
                     </a:p>
@@ -4652,7 +4672,16 @@
                         </a:defRPr>
                       </a:pPr>
                       <a:r>
-                        <a:t>✅  en dev</a:t>
+                        <a:rPr dirty="0"/>
+                        <a:t>✅  </a:t>
+                      </a:r>
+                      <a:r>
+                        <a:rPr dirty="0" err="1"/>
+                        <a:t>en</a:t>
+                      </a:r>
+                      <a:r>
+                        <a:rPr dirty="0"/>
+                        <a:t> dev</a:t>
                       </a:r>
                     </a:p>
                   </a:txBody>
@@ -4683,13 +4712,14 @@
                         </a:defRPr>
                       </a:pPr>
                       <a:r>
+                        <a:rPr dirty="0"/>
                         <a:t>07</a:t>
                       </a:r>
                     </a:p>
                   </a:txBody>
                   <a:tcPr anchor="ctr">
                     <a:solidFill>
-                      <a:srgbClr val="FFFFFF"/>
+                      <a:schemeClr val="bg1"/>
                     </a:solidFill>
                   </a:tcPr>
                 </a:tc>
@@ -4707,13 +4737,14 @@
                         </a:defRPr>
                       </a:pPr>
                       <a:r>
+                        <a:rPr dirty="0"/>
                         <a:t>UI — Next.js</a:t>
                       </a:r>
                     </a:p>
                   </a:txBody>
                   <a:tcPr anchor="ctr">
                     <a:solidFill>
-                      <a:srgbClr val="FFFFFF"/>
+                      <a:schemeClr val="bg1"/>
                     </a:solidFill>
                   </a:tcPr>
                 </a:tc>
@@ -4743,13 +4774,13 @@
                   </a:txBody>
                   <a:tcPr anchor="ctr">
                     <a:solidFill>
-                      <a:srgbClr val="FFFFFF"/>
+                      <a:schemeClr val="bg1"/>
                     </a:solidFill>
                   </a:tcPr>
                 </a:tc>
                 <a:extLst>
                   <a:ext uri="{0D108BD9-81ED-4DB2-BD59-A6C34878D82A}">
-                    <a16:rowId xmlns:a16="http://schemas.microsoft.com/office/drawing/2014/main" val="10007"/>
+                    <a16:rowId xmlns:a16="http://schemas.microsoft.com/office/drawing/2014/main" val="4025467862"/>
                   </a:ext>
                 </a:extLst>
               </a:tr>
@@ -4768,92 +4799,14 @@
                         </a:defRPr>
                       </a:pPr>
                       <a:r>
-                        <a:t>10</a:t>
-                      </a:r>
-                    </a:p>
-                  </a:txBody>
-                  <a:tcPr anchor="ctr">
-                    <a:solidFill>
-                      <a:srgbClr val="F5F3FF"/>
-                    </a:solidFill>
-                  </a:tcPr>
-                </a:tc>
-                <a:tc>
-                  <a:txBody>
-                    <a:bodyPr/>
-                    <a:lstStyle/>
-                    <a:p>
-                      <a:pPr>
-                        <a:defRPr sz="1250" b="0">
-                          <a:solidFill>
-                            <a:srgbClr val="1F2937"/>
-                          </a:solidFill>
-                          <a:latin typeface="Calibri"/>
-                        </a:defRPr>
-                      </a:pPr>
-                      <a:r>
-                        <a:t>Refactor de arquitectura</a:t>
-                      </a:r>
-                    </a:p>
-                  </a:txBody>
-                  <a:tcPr anchor="ctr">
-                    <a:solidFill>
-                      <a:srgbClr val="F5F3FF"/>
-                    </a:solidFill>
-                  </a:tcPr>
-                </a:tc>
-                <a:tc>
-                  <a:txBody>
-                    <a:bodyPr/>
-                    <a:lstStyle/>
-                    <a:p>
-                      <a:pPr>
-                        <a:defRPr sz="1250" b="1">
-                          <a:solidFill>
-                            <a:srgbClr val="10B981"/>
-                          </a:solidFill>
-                          <a:latin typeface="Calibri"/>
-                        </a:defRPr>
-                      </a:pPr>
-                      <a:r>
-                        <a:t>✅  en dev</a:t>
-                      </a:r>
-                    </a:p>
-                  </a:txBody>
-                  <a:tcPr anchor="ctr">
-                    <a:solidFill>
-                      <a:srgbClr val="F5F3FF"/>
-                    </a:solidFill>
-                  </a:tcPr>
-                </a:tc>
-                <a:extLst>
-                  <a:ext uri="{0D108BD9-81ED-4DB2-BD59-A6C34878D82A}">
-                    <a16:rowId xmlns:a16="http://schemas.microsoft.com/office/drawing/2014/main" val="10008"/>
-                  </a:ext>
-                </a:extLst>
-              </a:tr>
-              <a:tr h="390698">
-                <a:tc>
-                  <a:txBody>
-                    <a:bodyPr/>
-                    <a:lstStyle/>
-                    <a:p>
-                      <a:pPr>
-                        <a:defRPr sz="1250" b="1">
-                          <a:solidFill>
-                            <a:srgbClr val="4F46E5"/>
-                          </a:solidFill>
-                          <a:latin typeface="Calibri"/>
-                        </a:defRPr>
-                      </a:pPr>
-                      <a:r>
+                        <a:rPr dirty="0"/>
                         <a:t>08</a:t>
                       </a:r>
                     </a:p>
                   </a:txBody>
                   <a:tcPr anchor="ctr">
                     <a:solidFill>
-                      <a:srgbClr val="FFFFFF"/>
+                      <a:srgbClr val="EEEAF2"/>
                     </a:solidFill>
                   </a:tcPr>
                 </a:tc>
@@ -4877,7 +4830,7 @@
                   </a:txBody>
                   <a:tcPr anchor="ctr">
                     <a:solidFill>
-                      <a:srgbClr val="FFFFFF"/>
+                      <a:srgbClr val="EEEAF2"/>
                     </a:solidFill>
                   </a:tcPr>
                 </a:tc>
@@ -4895,13 +4848,27 @@
                         </a:defRPr>
                       </a:pPr>
                       <a:r>
-                        <a:t>⏳  feat/epic-08 · en progreso</a:t>
+                        <a:rPr dirty="0"/>
+                        <a:t>⏳  feat/epic-08 · </a:t>
                       </a:r>
+                      <a:r>
+                        <a:rPr dirty="0" err="1"/>
+                        <a:t>en</a:t>
+                      </a:r>
+                      <a:r>
+                        <a:rPr dirty="0"/>
+                        <a:t> </a:t>
+                      </a:r>
+                      <a:r>
+                        <a:rPr dirty="0" err="1"/>
+                        <a:t>progreso</a:t>
+                      </a:r>
+                      <a:endParaRPr dirty="0"/>
                     </a:p>
                   </a:txBody>
                   <a:tcPr anchor="ctr">
                     <a:solidFill>
-                      <a:srgbClr val="FFFFFF"/>
+                      <a:srgbClr val="EEEAF2"/>
                     </a:solidFill>
                   </a:tcPr>
                 </a:tc>
@@ -4926,13 +4893,14 @@
                         </a:defRPr>
                       </a:pPr>
                       <a:r>
+                        <a:rPr dirty="0"/>
                         <a:t>09</a:t>
                       </a:r>
                     </a:p>
                   </a:txBody>
                   <a:tcPr anchor="ctr">
                     <a:solidFill>
-                      <a:srgbClr val="F5F3FF"/>
+                      <a:schemeClr val="bg1"/>
                     </a:solidFill>
                   </a:tcPr>
                 </a:tc>
@@ -4956,7 +4924,7 @@
                   </a:txBody>
                   <a:tcPr anchor="ctr">
                     <a:solidFill>
-                      <a:srgbClr val="F5F3FF"/>
+                      <a:schemeClr val="bg1"/>
                     </a:solidFill>
                   </a:tcPr>
                 </a:tc>
@@ -4986,13 +4954,108 @@
                   </a:txBody>
                   <a:tcPr anchor="ctr">
                     <a:solidFill>
+                      <a:schemeClr val="bg1"/>
+                    </a:solidFill>
+                  </a:tcPr>
+                </a:tc>
+                <a:extLst>
+                  <a:ext uri="{0D108BD9-81ED-4DB2-BD59-A6C34878D82A}">
+                    <a16:rowId xmlns:a16="http://schemas.microsoft.com/office/drawing/2014/main" val="10010"/>
+                  </a:ext>
+                </a:extLst>
+              </a:tr>
+              <a:tr h="390700">
+                <a:tc>
+                  <a:txBody>
+                    <a:bodyPr/>
+                    <a:lstStyle/>
+                    <a:p>
+                      <a:pPr>
+                        <a:defRPr sz="1250" b="1">
+                          <a:solidFill>
+                            <a:srgbClr val="4F46E5"/>
+                          </a:solidFill>
+                          <a:latin typeface="Calibri"/>
+                        </a:defRPr>
+                      </a:pPr>
+                      <a:r>
+                        <a:rPr dirty="0"/>
+                        <a:t>10</a:t>
+                      </a:r>
+                    </a:p>
+                  </a:txBody>
+                  <a:tcPr anchor="ctr">
+                    <a:solidFill>
+                      <a:srgbClr val="F5F3FF"/>
+                    </a:solidFill>
+                  </a:tcPr>
+                </a:tc>
+                <a:tc>
+                  <a:txBody>
+                    <a:bodyPr/>
+                    <a:lstStyle/>
+                    <a:p>
+                      <a:pPr>
+                        <a:defRPr sz="1250" b="0">
+                          <a:solidFill>
+                            <a:srgbClr val="1F2937"/>
+                          </a:solidFill>
+                          <a:latin typeface="Calibri"/>
+                        </a:defRPr>
+                      </a:pPr>
+                      <a:r>
+                        <a:rPr dirty="0"/>
+                        <a:t>Refactor de </a:t>
+                      </a:r>
+                      <a:r>
+                        <a:rPr dirty="0" err="1"/>
+                        <a:t>arquitectura</a:t>
+                      </a:r>
+                      <a:endParaRPr dirty="0"/>
+                    </a:p>
+                  </a:txBody>
+                  <a:tcPr anchor="ctr">
+                    <a:solidFill>
+                      <a:srgbClr val="F5F3FF"/>
+                    </a:solidFill>
+                  </a:tcPr>
+                </a:tc>
+                <a:tc>
+                  <a:txBody>
+                    <a:bodyPr/>
+                    <a:lstStyle/>
+                    <a:p>
+                      <a:pPr>
+                        <a:defRPr sz="1250" b="1">
+                          <a:solidFill>
+                            <a:srgbClr val="10B981"/>
+                          </a:solidFill>
+                          <a:latin typeface="Calibri"/>
+                        </a:defRPr>
+                      </a:pPr>
+                      <a:r>
+                        <a:rPr dirty="0"/>
+                        <a:t>✅  </a:t>
+                      </a:r>
+                      <a:r>
+                        <a:rPr dirty="0" err="1"/>
+                        <a:t>en</a:t>
+                      </a:r>
+                      <a:r>
+                        <a:rPr dirty="0"/>
+                        <a:t> dev</a:t>
+                      </a:r>
+                    </a:p>
+                  </a:txBody>
+                  <a:tcPr anchor="ctr">
+                    <a:solidFill>
                       <a:srgbClr val="F5F3FF"/>
                     </a:solidFill>
                   </a:tcPr>
                 </a:tc>
                 <a:extLst>
                   <a:ext uri="{0D108BD9-81ED-4DB2-BD59-A6C34878D82A}">
-                    <a16:rowId xmlns:a16="http://schemas.microsoft.com/office/drawing/2014/main" val="10010"/>
+                    <a16:rowId xmlns:a16="http://schemas.microsoft.com/office/drawing/2014/main" val="3237913801"/>
                   </a:ext>
                 </a:extLst>
               </a:tr>
